--- a/ppt/uge39Loops_part1.pptx
+++ b/ppt/uge39Loops_part1.pptx
@@ -5,7 +5,7 @@
     <p:sldMasterId id="2147483648" r:id="rId4"/>
   </p:sldMasterIdLst>
   <p:notesMasterIdLst>
-    <p:notesMasterId r:id="rId31"/>
+    <p:notesMasterId r:id="rId32"/>
   </p:notesMasterIdLst>
   <p:sldIdLst>
     <p:sldId id="256" r:id="rId5"/>
@@ -17,23 +17,24 @@
     <p:sldId id="296" r:id="rId11"/>
     <p:sldId id="263" r:id="rId12"/>
     <p:sldId id="261" r:id="rId13"/>
-    <p:sldId id="262" r:id="rId14"/>
-    <p:sldId id="264" r:id="rId15"/>
+    <p:sldId id="264" r:id="rId14"/>
+    <p:sldId id="262" r:id="rId15"/>
     <p:sldId id="297" r:id="rId16"/>
     <p:sldId id="268" r:id="rId17"/>
     <p:sldId id="269" r:id="rId18"/>
     <p:sldId id="270" r:id="rId19"/>
-    <p:sldId id="298" r:id="rId20"/>
-    <p:sldId id="290" r:id="rId21"/>
-    <p:sldId id="259" r:id="rId22"/>
-    <p:sldId id="299" r:id="rId23"/>
-    <p:sldId id="288" r:id="rId24"/>
-    <p:sldId id="300" r:id="rId25"/>
-    <p:sldId id="276" r:id="rId26"/>
-    <p:sldId id="274" r:id="rId27"/>
-    <p:sldId id="273" r:id="rId28"/>
-    <p:sldId id="289" r:id="rId29"/>
-    <p:sldId id="301" r:id="rId30"/>
+    <p:sldId id="302" r:id="rId20"/>
+    <p:sldId id="298" r:id="rId21"/>
+    <p:sldId id="290" r:id="rId22"/>
+    <p:sldId id="259" r:id="rId23"/>
+    <p:sldId id="299" r:id="rId24"/>
+    <p:sldId id="288" r:id="rId25"/>
+    <p:sldId id="300" r:id="rId26"/>
+    <p:sldId id="289" r:id="rId27"/>
+    <p:sldId id="276" r:id="rId28"/>
+    <p:sldId id="274" r:id="rId29"/>
+    <p:sldId id="273" r:id="rId30"/>
+    <p:sldId id="301" r:id="rId31"/>
   </p:sldIdLst>
   <p:sldSz cx="12192000" cy="6858000"/>
   <p:notesSz cx="12192000" cy="6858000"/>
@@ -4016,7 +4017,7 @@
           <a:p>
             <a:fld id="{1129347E-893C-BE4D-82D7-086F268CE3C9}" type="datetimeFigureOut">
               <a:rPr lang="en-DK" smtClean="0"/>
-              <a:t>19/09/2026</a:t>
+              <a:t>21/09/2026</a:t>
             </a:fld>
             <a:endParaRPr lang="en-DK"/>
           </a:p>
@@ -4440,7 +4441,7 @@
           <a:p>
             <a:fld id="{7D8C4A44-45A6-9047-80DD-6777D98D193C}" type="slidenum">
               <a:rPr lang="en-DK" smtClean="0"/>
-              <a:t>17</a:t>
+              <a:t>18</a:t>
             </a:fld>
             <a:endParaRPr lang="en-DK"/>
           </a:p>
@@ -4761,7 +4762,7 @@
           <a:p>
             <a:fld id="{7D8C4A44-45A6-9047-80DD-6777D98D193C}" type="slidenum">
               <a:rPr lang="en-DK" smtClean="0"/>
-              <a:t>18</a:t>
+              <a:t>19</a:t>
             </a:fld>
             <a:endParaRPr lang="en-DK"/>
           </a:p>
@@ -4845,7 +4846,7 @@
           <a:p>
             <a:fld id="{F7021451-1387-4CA6-816F-3879F97B5CBC}" type="slidenum">
               <a:rPr lang="en-US"/>
-              <a:t>19</a:t>
+              <a:t>20</a:t>
             </a:fld>
             <a:endParaRPr lang="en-US"/>
           </a:p>
@@ -5195,7 +5196,7 @@
           <a:p>
             <a:fld id="{7D8C4A44-45A6-9047-80DD-6777D98D193C}" type="slidenum">
               <a:rPr lang="en-DK" smtClean="0"/>
-              <a:t>24</a:t>
+              <a:t>26</a:t>
             </a:fld>
             <a:endParaRPr lang="en-DK"/>
           </a:p>
@@ -5258,6 +5259,14 @@
           <a:bodyPr/>
           <a:lstStyle/>
           <a:p>
+            <a:r>
+              <a:rPr lang="en-GB" dirty="0"/>
+              <a:t>M</a:t>
+            </a:r>
+            <a:r>
+              <a:rPr lang="en-DK"/>
+              <a:t>arco - String</a:t>
+            </a:r>
             <a:endParaRPr lang="en-DK" dirty="0"/>
           </a:p>
         </p:txBody>
@@ -5279,7 +5288,7 @@
           <a:p>
             <a:fld id="{7D8C4A44-45A6-9047-80DD-6777D98D193C}" type="slidenum">
               <a:rPr lang="en-DK" smtClean="0"/>
-              <a:t>26</a:t>
+              <a:t>27</a:t>
             </a:fld>
             <a:endParaRPr lang="en-DK"/>
           </a:p>
@@ -5848,19 +5857,7 @@
           <a:p>
             <a:r>
               <a:rPr lang="en-DK" dirty="0"/>
-              <a:t>Specifier</a:t>
-            </a:r>
-          </a:p>
-          <a:p>
-            <a:r>
-              <a:rPr lang="en-DK" dirty="0"/>
-              <a:t>Used for</a:t>
-            </a:r>
-          </a:p>
-          <a:p>
-            <a:r>
-              <a:rPr lang="en-DK" dirty="0"/>
-              <a:t>Example</a:t>
+              <a:t> </a:t>
             </a:r>
           </a:p>
           <a:p>
@@ -5879,6 +5876,8 @@
               <a:rPr lang="en-DK" dirty="0"/>
               <a:t>Integer</a:t>
             </a:r>
+          </a:p>
+          <a:p>
             <a:r>
               <a:rPr lang="en-DK" sz="1200" kern="1200" dirty="0">
                 <a:solidFill>
@@ -5888,38 +5887,12 @@
                 <a:ea typeface="+mn-ea"/>
                 <a:cs typeface="+mn-cs"/>
               </a:rPr>
-              <a:t>42</a:t>
-            </a:r>
-            <a:endParaRPr lang="en-DK" dirty="0"/>
-          </a:p>
-          <a:p>
-            <a:r>
-              <a:rPr lang="en-DK" sz="1200" kern="1200" dirty="0">
-                <a:solidFill>
-                  <a:schemeClr val="tx1"/>
-                </a:solidFill>
-                <a:latin typeface="+mn-lt"/>
-                <a:ea typeface="+mn-ea"/>
-                <a:cs typeface="+mn-cs"/>
-              </a:rPr>
               <a:t>%f</a:t>
             </a:r>
             <a:r>
               <a:rPr lang="en-DK" dirty="0"/>
               <a:t>Floating-point</a:t>
             </a:r>
-            <a:r>
-              <a:rPr lang="en-DK" sz="1200" kern="1200" dirty="0">
-                <a:solidFill>
-                  <a:schemeClr val="tx1"/>
-                </a:solidFill>
-                <a:latin typeface="+mn-lt"/>
-                <a:ea typeface="+mn-ea"/>
-                <a:cs typeface="+mn-cs"/>
-              </a:rPr>
-              <a:t>3.14</a:t>
-            </a:r>
-            <a:endParaRPr lang="en-DK" dirty="0"/>
           </a:p>
           <a:p>
             <a:r>
@@ -6047,7 +6020,7 @@
           <a:p>
             <a:fld id="{7D8C4A44-45A6-9047-80DD-6777D98D193C}" type="slidenum">
               <a:rPr lang="en-DK" smtClean="0"/>
-              <a:t>10</a:t>
+              <a:t>11</a:t>
             </a:fld>
             <a:endParaRPr lang="en-DK"/>
           </a:p>
@@ -6131,7 +6104,7 @@
           <a:p>
             <a:fld id="{F7021451-1387-4CA6-816F-3879F97B5CBC}" type="slidenum">
               <a:rPr lang="en-US"/>
-              <a:t>16</a:t>
+              <a:t>17</a:t>
             </a:fld>
             <a:endParaRPr lang="en-US"/>
           </a:p>
@@ -6361,7 +6334,7 @@
           <a:p>
             <a:fld id="{1D8BD707-D9CF-40AE-B4C6-C98DA3205C09}" type="datetimeFigureOut">
               <a:rPr lang="en-US"/>
-              <a:t>9/19/26</a:t>
+              <a:t>9/21/26</a:t>
             </a:fld>
             <a:endParaRPr lang="en-US"/>
           </a:p>
@@ -6598,7 +6571,7 @@
           <a:p>
             <a:fld id="{1D8BD707-D9CF-40AE-B4C6-C98DA3205C09}" type="datetimeFigureOut">
               <a:rPr lang="en-US"/>
-              <a:t>9/19/26</a:t>
+              <a:t>9/21/26</a:t>
             </a:fld>
             <a:endParaRPr lang="en-US"/>
           </a:p>
@@ -6878,7 +6851,7 @@
           <a:p>
             <a:fld id="{1D8BD707-D9CF-40AE-B4C6-C98DA3205C09}" type="datetimeFigureOut">
               <a:rPr lang="en-US"/>
-              <a:t>9/19/26</a:t>
+              <a:t>9/21/26</a:t>
             </a:fld>
             <a:endParaRPr lang="en-US"/>
           </a:p>
@@ -7092,7 +7065,7 @@
           <a:p>
             <a:fld id="{1D8BD707-D9CF-40AE-B4C6-C98DA3205C09}" type="datetimeFigureOut">
               <a:rPr lang="en-US"/>
-              <a:t>9/19/26</a:t>
+              <a:t>9/21/26</a:t>
             </a:fld>
             <a:endParaRPr lang="en-US"/>
           </a:p>
@@ -7283,7 +7256,7 @@
           <a:p>
             <a:fld id="{1D8BD707-D9CF-40AE-B4C6-C98DA3205C09}" type="datetimeFigureOut">
               <a:rPr lang="en-US"/>
-              <a:t>9/19/26</a:t>
+              <a:t>9/21/26</a:t>
             </a:fld>
             <a:endParaRPr lang="en-US"/>
           </a:p>
@@ -7603,7 +7576,7 @@
           <a:p>
             <a:fld id="{1D8BD707-D9CF-40AE-B4C6-C98DA3205C09}" type="datetimeFigureOut">
               <a:rPr lang="en-US"/>
-              <a:t>9/19/26</a:t>
+              <a:t>9/21/26</a:t>
             </a:fld>
             <a:endParaRPr lang="en-US"/>
           </a:p>
@@ -8259,15 +8232,15 @@
           <p:nvPr/>
         </p:nvPicPr>
         <p:blipFill>
-          <a:blip r:embed="rId3" cstate="print"/>
+          <a:blip r:embed="rId2" cstate="print"/>
           <a:stretch>
             <a:fillRect/>
           </a:stretch>
         </p:blipFill>
         <p:spPr>
           <a:xfrm>
-            <a:off x="1915103" y="1286345"/>
-            <a:ext cx="8361792" cy="4285309"/>
+            <a:off x="685782" y="714073"/>
+            <a:ext cx="5091210" cy="338613"/>
           </a:xfrm>
           <a:prstGeom prst="rect">
             <a:avLst/>
@@ -8282,15 +8255,15 @@
         </p:nvSpPr>
         <p:spPr>
           <a:xfrm>
-            <a:off x="2061591" y="443547"/>
-            <a:ext cx="971550" cy="300355"/>
+            <a:off x="2147316" y="1875088"/>
+            <a:ext cx="8215884" cy="1999586"/>
           </a:xfrm>
           <a:prstGeom prst="rect">
             <a:avLst/>
           </a:prstGeom>
         </p:spPr>
         <p:txBody>
-          <a:bodyPr vert="horz" wrap="square" lIns="0" tIns="12700" rIns="0" bIns="0" rtlCol="0">
+          <a:bodyPr vert="horz" wrap="square" lIns="0" tIns="12700" rIns="0" bIns="0" rtlCol="0" anchor="t">
             <a:spAutoFit/>
           </a:bodyPr>
           <a:lstStyle/>
@@ -8302,166 +8275,313 @@
               <a:spcBef>
                 <a:spcPts val="100"/>
               </a:spcBef>
+              <a:buClr>
+                <a:srgbClr val="2CA1BE"/>
+              </a:buClr>
+              <a:buSzPct val="68750"/>
+              <a:tabLst>
+                <a:tab pos="203200" algn="l"/>
+              </a:tabLst>
             </a:pPr>
             <a:r>
-              <a:rPr sz="1800" spc="-10" dirty="0">
-                <a:latin typeface="Arial"/>
-                <a:cs typeface="Arial"/>
-              </a:rPr>
-              <a:t>For1.java</a:t>
-            </a:r>
-            <a:endParaRPr sz="1800">
-              <a:latin typeface="Arial"/>
-              <a:cs typeface="Arial"/>
+              <a:rPr lang="da-DK" sz="2400" spc="65" dirty="0">
+                <a:latin typeface="Times New Roman"/>
+                <a:cs typeface="Times New Roman"/>
+              </a:rPr>
+              <a:t> </a:t>
+            </a:r>
+            <a:endParaRPr sz="2400" dirty="0">
+              <a:latin typeface="Times New Roman"/>
+              <a:cs typeface="Times New Roman"/>
             </a:endParaRPr>
           </a:p>
-        </p:txBody>
-      </p:sp>
-      <p:sp>
-        <p:nvSpPr>
-          <p:cNvPr id="4" name="object 4"/>
-          <p:cNvSpPr txBox="1"/>
-          <p:nvPr/>
+          <a:p>
+            <a:pPr marL="994410" marR="210820" indent="-419100">
+              <a:lnSpc>
+                <a:spcPts val="2100"/>
+              </a:lnSpc>
+              <a:spcBef>
+                <a:spcPts val="395"/>
+              </a:spcBef>
+            </a:pPr>
+            <a:r>
+              <a:rPr sz="2800" spc="-55" dirty="0">
+                <a:solidFill>
+                  <a:srgbClr val="0000FF"/>
+                </a:solidFill>
+                <a:latin typeface="Arial" panose="020B0604020202020204" pitchFamily="34" charset="0"/>
+                <a:cs typeface="Arial" panose="020B0604020202020204" pitchFamily="34" charset="0"/>
+              </a:rPr>
+              <a:t>for</a:t>
+            </a:r>
+            <a:r>
+              <a:rPr sz="2800" spc="-5" dirty="0">
+                <a:solidFill>
+                  <a:srgbClr val="0000FF"/>
+                </a:solidFill>
+                <a:latin typeface="Arial" panose="020B0604020202020204" pitchFamily="34" charset="0"/>
+                <a:cs typeface="Arial" panose="020B0604020202020204" pitchFamily="34" charset="0"/>
+              </a:rPr>
+              <a:t> </a:t>
+            </a:r>
+            <a:r>
+              <a:rPr sz="2800" dirty="0">
+                <a:latin typeface="Arial" panose="020B0604020202020204" pitchFamily="34" charset="0"/>
+                <a:cs typeface="Arial" panose="020B0604020202020204" pitchFamily="34" charset="0"/>
+              </a:rPr>
+              <a:t>(</a:t>
+            </a:r>
+            <a:r>
+              <a:rPr sz="2800" i="1" dirty="0">
+                <a:latin typeface="Arial" panose="020B0604020202020204" pitchFamily="34" charset="0"/>
+                <a:cs typeface="Arial" panose="020B0604020202020204" pitchFamily="34" charset="0"/>
+              </a:rPr>
+              <a:t>initialization</a:t>
+            </a:r>
+            <a:r>
+              <a:rPr sz="2800" i="1" dirty="0">
+                <a:solidFill>
+                  <a:srgbClr val="FF0000"/>
+                </a:solidFill>
+                <a:latin typeface="Arial" panose="020B0604020202020204" pitchFamily="34" charset="0"/>
+                <a:cs typeface="Arial" panose="020B0604020202020204" pitchFamily="34" charset="0"/>
+              </a:rPr>
+              <a:t>;</a:t>
+            </a:r>
+            <a:r>
+              <a:rPr sz="2800" i="1" spc="85" dirty="0">
+                <a:solidFill>
+                  <a:srgbClr val="FF0000"/>
+                </a:solidFill>
+                <a:latin typeface="Arial" panose="020B0604020202020204" pitchFamily="34" charset="0"/>
+                <a:cs typeface="Arial" panose="020B0604020202020204" pitchFamily="34" charset="0"/>
+              </a:rPr>
+              <a:t> </a:t>
+            </a:r>
+            <a:endParaRPr lang="da-DK" sz="2800" i="1" spc="85" dirty="0">
+              <a:solidFill>
+                <a:srgbClr val="FF0000"/>
+              </a:solidFill>
+              <a:latin typeface="Arial" panose="020B0604020202020204" pitchFamily="34" charset="0"/>
+              <a:cs typeface="Arial" panose="020B0604020202020204" pitchFamily="34" charset="0"/>
+            </a:endParaRPr>
+          </a:p>
+          <a:p>
+            <a:pPr marL="994410" marR="210820" indent="-419100">
+              <a:lnSpc>
+                <a:spcPts val="2100"/>
+              </a:lnSpc>
+              <a:spcBef>
+                <a:spcPts val="395"/>
+              </a:spcBef>
+            </a:pPr>
+            <a:r>
+              <a:rPr lang="en-DK" sz="2800" i="1" spc="85" dirty="0">
+                <a:solidFill>
+                  <a:srgbClr val="FF0000"/>
+                </a:solidFill>
+                <a:latin typeface="Arial" panose="020B0604020202020204" pitchFamily="34" charset="0"/>
+                <a:cs typeface="Arial" panose="020B0604020202020204" pitchFamily="34" charset="0"/>
+              </a:rPr>
+              <a:t>     </a:t>
+            </a:r>
+            <a:r>
+              <a:rPr sz="2800" i="1" dirty="0" err="1">
+                <a:latin typeface="Arial" panose="020B0604020202020204" pitchFamily="34" charset="0"/>
+                <a:cs typeface="Arial" panose="020B0604020202020204" pitchFamily="34" charset="0"/>
+              </a:rPr>
+              <a:t>loopContinuationCondition</a:t>
+            </a:r>
+            <a:r>
+              <a:rPr sz="2800" i="1" dirty="0">
+                <a:solidFill>
+                  <a:srgbClr val="FF0000"/>
+                </a:solidFill>
+                <a:latin typeface="Arial" panose="020B0604020202020204" pitchFamily="34" charset="0"/>
+                <a:cs typeface="Arial" panose="020B0604020202020204" pitchFamily="34" charset="0"/>
+              </a:rPr>
+              <a:t>;</a:t>
+            </a:r>
+            <a:r>
+              <a:rPr sz="2800" i="1" spc="-85" dirty="0">
+                <a:solidFill>
+                  <a:srgbClr val="FF0000"/>
+                </a:solidFill>
+                <a:latin typeface="Arial" panose="020B0604020202020204" pitchFamily="34" charset="0"/>
+                <a:cs typeface="Arial" panose="020B0604020202020204" pitchFamily="34" charset="0"/>
+              </a:rPr>
+              <a:t> </a:t>
+            </a:r>
+            <a:endParaRPr lang="da-DK" sz="2800" i="1" spc="-85" dirty="0">
+              <a:solidFill>
+                <a:srgbClr val="FF0000"/>
+              </a:solidFill>
+              <a:latin typeface="Arial" panose="020B0604020202020204" pitchFamily="34" charset="0"/>
+              <a:cs typeface="Arial" panose="020B0604020202020204" pitchFamily="34" charset="0"/>
+            </a:endParaRPr>
+          </a:p>
+          <a:p>
+            <a:pPr marL="994410" marR="210820" indent="-419100">
+              <a:lnSpc>
+                <a:spcPts val="2100"/>
+              </a:lnSpc>
+              <a:spcBef>
+                <a:spcPts val="395"/>
+              </a:spcBef>
+            </a:pPr>
+            <a:r>
+              <a:rPr lang="en-DK" sz="2800" i="1" spc="-85" dirty="0">
+                <a:solidFill>
+                  <a:srgbClr val="FF0000"/>
+                </a:solidFill>
+                <a:latin typeface="Arial" panose="020B0604020202020204" pitchFamily="34" charset="0"/>
+                <a:cs typeface="Arial" panose="020B0604020202020204" pitchFamily="34" charset="0"/>
+              </a:rPr>
+              <a:t>       </a:t>
+            </a:r>
+            <a:r>
+              <a:rPr sz="2800" i="1" spc="-10" dirty="0">
+                <a:latin typeface="Arial" panose="020B0604020202020204" pitchFamily="34" charset="0"/>
+                <a:cs typeface="Arial" panose="020B0604020202020204" pitchFamily="34" charset="0"/>
+              </a:rPr>
+              <a:t>increment) </a:t>
+            </a:r>
+            <a:endParaRPr lang="da-DK" sz="2800" i="1" spc="-10" dirty="0">
+              <a:latin typeface="Arial" panose="020B0604020202020204" pitchFamily="34" charset="0"/>
+              <a:cs typeface="Arial" panose="020B0604020202020204" pitchFamily="34" charset="0"/>
+            </a:endParaRPr>
+          </a:p>
+          <a:p>
+            <a:pPr marL="994410" marR="210820" indent="-419100">
+              <a:lnSpc>
+                <a:spcPts val="2100"/>
+              </a:lnSpc>
+              <a:spcBef>
+                <a:spcPts val="395"/>
+              </a:spcBef>
+            </a:pPr>
+            <a:endParaRPr lang="en-DK" sz="2800" i="1" spc="-10" dirty="0">
+              <a:latin typeface="Arial" panose="020B0604020202020204" pitchFamily="34" charset="0"/>
+              <a:cs typeface="Arial" panose="020B0604020202020204" pitchFamily="34" charset="0"/>
+            </a:endParaRPr>
+          </a:p>
+          <a:p>
+            <a:pPr marL="994410" marR="210820" indent="-419100">
+              <a:lnSpc>
+                <a:spcPts val="2100"/>
+              </a:lnSpc>
+              <a:spcBef>
+                <a:spcPts val="395"/>
+              </a:spcBef>
+            </a:pPr>
+            <a:r>
+              <a:rPr sz="2800" i="1" spc="60" dirty="0">
+                <a:latin typeface="Arial" panose="020B0604020202020204" pitchFamily="34" charset="0"/>
+                <a:cs typeface="Arial" panose="020B0604020202020204" pitchFamily="34" charset="0"/>
+              </a:rPr>
+              <a:t>statement</a:t>
+            </a:r>
+            <a:endParaRPr sz="2800" dirty="0">
+              <a:latin typeface="Arial" panose="020B0604020202020204" pitchFamily="34" charset="0"/>
+              <a:cs typeface="Arial" panose="020B0604020202020204" pitchFamily="34" charset="0"/>
+            </a:endParaRPr>
+          </a:p>
+        </p:txBody>
+      </p:sp>
+      <p:sp>
+        <p:nvSpPr>
+          <p:cNvPr id="7" name="object 7"/>
+          <p:cNvSpPr txBox="1">
+            <a:spLocks noGrp="1"/>
+          </p:cNvSpPr>
+          <p:nvPr>
+            <p:ph type="ftr" sz="quarter" idx="5"/>
+          </p:nvPr>
         </p:nvSpPr>
         <p:spPr>
-          <a:xfrm>
-            <a:off x="688975" y="6614792"/>
-            <a:ext cx="2542540" cy="137795"/>
-          </a:xfrm>
           <a:prstGeom prst="rect">
             <a:avLst/>
           </a:prstGeom>
         </p:spPr>
         <p:txBody>
-          <a:bodyPr vert="horz" wrap="square" lIns="0" tIns="8255" rIns="0" bIns="0" rtlCol="0">
+          <a:bodyPr vert="horz" wrap="square" lIns="0" tIns="0" rIns="0" bIns="0" rtlCol="0">
             <a:spAutoFit/>
           </a:bodyPr>
           <a:lstStyle/>
           <a:p>
             <a:pPr marL="12700">
               <a:lnSpc>
-                <a:spcPct val="100000"/>
+                <a:spcPts val="815"/>
               </a:lnSpc>
-              <a:spcBef>
-                <a:spcPts val="65"/>
-              </a:spcBef>
             </a:pPr>
             <a:r>
-              <a:rPr sz="750" dirty="0">
-                <a:latin typeface="Times New Roman"/>
-                <a:cs typeface="Times New Roman"/>
-              </a:rPr>
+              <a:rPr spc="-35" dirty="0"/>
               <a:t>Copyright</a:t>
             </a:r>
             <a:r>
-              <a:rPr sz="750" spc="-20" dirty="0">
-                <a:latin typeface="Times New Roman"/>
-                <a:cs typeface="Times New Roman"/>
-              </a:rPr>
+              <a:rPr spc="25" dirty="0"/>
               <a:t> </a:t>
             </a:r>
             <a:r>
-              <a:rPr sz="750" spc="60" dirty="0">
-                <a:latin typeface="Times New Roman"/>
-                <a:cs typeface="Times New Roman"/>
-              </a:rPr>
+              <a:rPr spc="75" dirty="0"/>
               <a:t>©</a:t>
             </a:r>
             <a:r>
-              <a:rPr sz="750" spc="80" dirty="0">
-                <a:latin typeface="Times New Roman"/>
-                <a:cs typeface="Times New Roman"/>
-              </a:rPr>
+              <a:rPr spc="-20" dirty="0"/>
               <a:t> </a:t>
             </a:r>
             <a:r>
-              <a:rPr sz="750" spc="60" dirty="0">
-                <a:latin typeface="Times New Roman"/>
-                <a:cs typeface="Times New Roman"/>
-              </a:rPr>
+              <a:rPr spc="-45" dirty="0"/>
               <a:t>2020</a:t>
             </a:r>
             <a:r>
-              <a:rPr sz="750" spc="70" dirty="0">
-                <a:latin typeface="Times New Roman"/>
-                <a:cs typeface="Times New Roman"/>
-              </a:rPr>
+              <a:rPr spc="-60" dirty="0"/>
               <a:t> </a:t>
             </a:r>
             <a:r>
-              <a:rPr sz="750" dirty="0">
-                <a:latin typeface="Times New Roman"/>
-                <a:cs typeface="Times New Roman"/>
-              </a:rPr>
+              <a:rPr spc="-55" dirty="0"/>
               <a:t>Pearson</a:t>
             </a:r>
             <a:r>
-              <a:rPr sz="750" spc="75" dirty="0">
-                <a:latin typeface="Times New Roman"/>
-                <a:cs typeface="Times New Roman"/>
-              </a:rPr>
+              <a:rPr dirty="0"/>
               <a:t> </a:t>
             </a:r>
             <a:r>
-              <a:rPr sz="750" dirty="0">
-                <a:latin typeface="Times New Roman"/>
-                <a:cs typeface="Times New Roman"/>
-              </a:rPr>
+              <a:rPr spc="-40" dirty="0"/>
               <a:t>Education</a:t>
             </a:r>
             <a:r>
-              <a:rPr sz="750" spc="70" dirty="0">
-                <a:latin typeface="Times New Roman"/>
-                <a:cs typeface="Times New Roman"/>
-              </a:rPr>
+              <a:rPr spc="60" dirty="0"/>
               <a:t> </a:t>
             </a:r>
             <a:r>
-              <a:rPr sz="750" spc="-20" dirty="0">
-                <a:latin typeface="Times New Roman"/>
-                <a:cs typeface="Times New Roman"/>
-              </a:rPr>
+              <a:rPr spc="-25" dirty="0"/>
               <a:t>Ltd.</a:t>
             </a:r>
             <a:r>
-              <a:rPr sz="750" spc="20" dirty="0">
-                <a:latin typeface="Times New Roman"/>
-                <a:cs typeface="Times New Roman"/>
-              </a:rPr>
+              <a:rPr spc="35" dirty="0"/>
               <a:t> </a:t>
             </a:r>
             <a:r>
-              <a:rPr sz="750" spc="-30" dirty="0">
-                <a:latin typeface="Times New Roman"/>
-                <a:cs typeface="Times New Roman"/>
-              </a:rPr>
+              <a:rPr spc="-10" dirty="0"/>
               <a:t>All</a:t>
             </a:r>
             <a:r>
-              <a:rPr sz="750" spc="60" dirty="0">
-                <a:latin typeface="Times New Roman"/>
-                <a:cs typeface="Times New Roman"/>
-              </a:rPr>
+              <a:rPr spc="-20" dirty="0"/>
               <a:t> </a:t>
             </a:r>
             <a:r>
-              <a:rPr sz="750" dirty="0">
-                <a:latin typeface="Times New Roman"/>
-                <a:cs typeface="Times New Roman"/>
-              </a:rPr>
+              <a:rPr spc="-50" dirty="0"/>
               <a:t>Rights</a:t>
             </a:r>
             <a:r>
-              <a:rPr sz="750" spc="-10" dirty="0">
-                <a:latin typeface="Times New Roman"/>
-                <a:cs typeface="Times New Roman"/>
-              </a:rPr>
-              <a:t> Reserved</a:t>
-            </a:r>
-            <a:endParaRPr sz="750">
-              <a:latin typeface="Times New Roman"/>
-              <a:cs typeface="Times New Roman"/>
-            </a:endParaRPr>
+              <a:rPr spc="15" dirty="0"/>
+              <a:t> </a:t>
+            </a:r>
+            <a:r>
+              <a:rPr spc="-30" dirty="0"/>
+              <a:t>Reserved</a:t>
+            </a:r>
           </a:p>
         </p:txBody>
       </p:sp>
@@ -8497,15 +8617,15 @@
           <p:nvPr/>
         </p:nvPicPr>
         <p:blipFill>
-          <a:blip r:embed="rId2" cstate="print"/>
+          <a:blip r:embed="rId3" cstate="print"/>
           <a:stretch>
             <a:fillRect/>
           </a:stretch>
         </p:blipFill>
         <p:spPr>
           <a:xfrm>
-            <a:off x="685782" y="714073"/>
-            <a:ext cx="5091210" cy="338613"/>
+            <a:off x="1915103" y="1286345"/>
+            <a:ext cx="8361792" cy="4285309"/>
           </a:xfrm>
           <a:prstGeom prst="rect">
             <a:avLst/>
@@ -8520,371 +8640,8 @@
         </p:nvSpPr>
         <p:spPr>
           <a:xfrm>
-            <a:off x="2147316" y="1206436"/>
-            <a:ext cx="7504430" cy="972061"/>
-          </a:xfrm>
-          <a:prstGeom prst="rect">
-            <a:avLst/>
-          </a:prstGeom>
-        </p:spPr>
-        <p:txBody>
-          <a:bodyPr vert="horz" wrap="square" lIns="0" tIns="12700" rIns="0" bIns="0" rtlCol="0" anchor="t">
-            <a:spAutoFit/>
-          </a:bodyPr>
-          <a:lstStyle/>
-          <a:p>
-            <a:pPr marL="203200" indent="-190500">
-              <a:lnSpc>
-                <a:spcPct val="100000"/>
-              </a:lnSpc>
-              <a:spcBef>
-                <a:spcPts val="100"/>
-              </a:spcBef>
-              <a:buClr>
-                <a:srgbClr val="2CA1BE"/>
-              </a:buClr>
-              <a:buSzPct val="68750"/>
-              <a:buFont typeface="Wingdings 3"/>
-              <a:buChar char=""/>
-              <a:tabLst>
-                <a:tab pos="203200" algn="l"/>
-              </a:tabLst>
-            </a:pPr>
-            <a:r>
-              <a:rPr sz="2400" spc="65" dirty="0">
-                <a:latin typeface="Times New Roman"/>
-                <a:cs typeface="Times New Roman"/>
-              </a:rPr>
-              <a:t>The</a:t>
-            </a:r>
-            <a:r>
-              <a:rPr sz="2400" spc="-114" dirty="0">
-                <a:latin typeface="Times New Roman"/>
-                <a:cs typeface="Times New Roman"/>
-              </a:rPr>
-              <a:t> </a:t>
-            </a:r>
-            <a:r>
-              <a:rPr sz="2400" spc="80" dirty="0">
-                <a:latin typeface="Times New Roman"/>
-                <a:cs typeface="Times New Roman"/>
-              </a:rPr>
-              <a:t>general</a:t>
-            </a:r>
-            <a:r>
-              <a:rPr sz="2400" spc="-120" dirty="0">
-                <a:latin typeface="Times New Roman"/>
-                <a:cs typeface="Times New Roman"/>
-              </a:rPr>
-              <a:t> </a:t>
-            </a:r>
-            <a:r>
-              <a:rPr sz="2400" spc="95" dirty="0">
-                <a:latin typeface="Times New Roman"/>
-                <a:cs typeface="Times New Roman"/>
-              </a:rPr>
-              <a:t>format</a:t>
-            </a:r>
-            <a:r>
-              <a:rPr sz="2400" spc="-130" dirty="0">
-                <a:latin typeface="Times New Roman"/>
-                <a:cs typeface="Times New Roman"/>
-              </a:rPr>
-              <a:t> </a:t>
-            </a:r>
-            <a:r>
-              <a:rPr sz="2400" dirty="0">
-                <a:latin typeface="Times New Roman"/>
-                <a:cs typeface="Times New Roman"/>
-              </a:rPr>
-              <a:t>of</a:t>
-            </a:r>
-            <a:r>
-              <a:rPr sz="2400" spc="-35" dirty="0">
-                <a:latin typeface="Times New Roman"/>
-                <a:cs typeface="Times New Roman"/>
-              </a:rPr>
-              <a:t> </a:t>
-            </a:r>
-            <a:r>
-              <a:rPr sz="2400" spc="130" dirty="0">
-                <a:latin typeface="Times New Roman"/>
-                <a:cs typeface="Times New Roman"/>
-              </a:rPr>
-              <a:t>the</a:t>
-            </a:r>
-            <a:r>
-              <a:rPr sz="2400" spc="-40" dirty="0">
-                <a:latin typeface="Times New Roman"/>
-                <a:cs typeface="Times New Roman"/>
-              </a:rPr>
-              <a:t> </a:t>
-            </a:r>
-            <a:r>
-              <a:rPr sz="2400" spc="-120" dirty="0">
-                <a:latin typeface="Monaco"/>
-                <a:cs typeface="Monaco"/>
-              </a:rPr>
-              <a:t>for</a:t>
-            </a:r>
-            <a:r>
-              <a:rPr sz="2400" spc="-944" dirty="0">
-                <a:latin typeface="Monaco"/>
-                <a:cs typeface="Monaco"/>
-              </a:rPr>
-              <a:t> </a:t>
-            </a:r>
-            <a:r>
-              <a:rPr sz="2400" spc="135" dirty="0">
-                <a:latin typeface="Times New Roman"/>
-                <a:cs typeface="Times New Roman"/>
-              </a:rPr>
-              <a:t>statement</a:t>
-            </a:r>
-            <a:r>
-              <a:rPr sz="2400" spc="-280" dirty="0">
-                <a:latin typeface="Times New Roman"/>
-                <a:cs typeface="Times New Roman"/>
-              </a:rPr>
-              <a:t> </a:t>
-            </a:r>
-            <a:r>
-              <a:rPr sz="2400" spc="-25" dirty="0">
-                <a:latin typeface="Times New Roman"/>
-                <a:cs typeface="Times New Roman"/>
-              </a:rPr>
-              <a:t>is</a:t>
-            </a:r>
-            <a:endParaRPr sz="2400" dirty="0">
-              <a:latin typeface="Times New Roman"/>
-              <a:cs typeface="Times New Roman"/>
-            </a:endParaRPr>
-          </a:p>
-          <a:p>
-            <a:pPr marL="994410" marR="210820" indent="-419100">
-              <a:lnSpc>
-                <a:spcPts val="2100"/>
-              </a:lnSpc>
-              <a:spcBef>
-                <a:spcPts val="395"/>
-              </a:spcBef>
-            </a:pPr>
-            <a:r>
-              <a:rPr sz="2000" spc="-55" dirty="0">
-                <a:solidFill>
-                  <a:srgbClr val="0000FF"/>
-                </a:solidFill>
-                <a:latin typeface="Monaco"/>
-                <a:cs typeface="Monaco"/>
-              </a:rPr>
-              <a:t>for</a:t>
-            </a:r>
-            <a:r>
-              <a:rPr sz="2000" spc="-5" dirty="0">
-                <a:solidFill>
-                  <a:srgbClr val="0000FF"/>
-                </a:solidFill>
-                <a:latin typeface="Monaco"/>
-                <a:cs typeface="Monaco"/>
-              </a:rPr>
-              <a:t> </a:t>
-            </a:r>
-            <a:r>
-              <a:rPr sz="2000" dirty="0">
-                <a:latin typeface="Monaco"/>
-                <a:cs typeface="Monaco"/>
-              </a:rPr>
-              <a:t>(</a:t>
-            </a:r>
-            <a:r>
-              <a:rPr sz="2000" i="1" dirty="0">
-                <a:latin typeface="Times New Roman"/>
-                <a:cs typeface="Times New Roman"/>
-              </a:rPr>
-              <a:t>initialization</a:t>
-            </a:r>
-            <a:r>
-              <a:rPr sz="2000" i="1" dirty="0">
-                <a:solidFill>
-                  <a:srgbClr val="FF0000"/>
-                </a:solidFill>
-                <a:latin typeface="Courier New"/>
-                <a:cs typeface="Courier New"/>
-              </a:rPr>
-              <a:t>;</a:t>
-            </a:r>
-            <a:r>
-              <a:rPr sz="2000" i="1" spc="85" dirty="0">
-                <a:solidFill>
-                  <a:srgbClr val="FF0000"/>
-                </a:solidFill>
-                <a:latin typeface="Courier New"/>
-                <a:cs typeface="Courier New"/>
-              </a:rPr>
-              <a:t> </a:t>
-            </a:r>
-            <a:r>
-              <a:rPr sz="2000" i="1" dirty="0">
-                <a:latin typeface="Times New Roman"/>
-                <a:cs typeface="Times New Roman"/>
-              </a:rPr>
-              <a:t>loopContinuationCondition</a:t>
-            </a:r>
-            <a:r>
-              <a:rPr sz="2000" i="1" dirty="0">
-                <a:solidFill>
-                  <a:srgbClr val="FF0000"/>
-                </a:solidFill>
-                <a:latin typeface="Courier New"/>
-                <a:cs typeface="Courier New"/>
-              </a:rPr>
-              <a:t>;</a:t>
-            </a:r>
-            <a:r>
-              <a:rPr sz="2000" i="1" spc="-85" dirty="0">
-                <a:solidFill>
-                  <a:srgbClr val="FF0000"/>
-                </a:solidFill>
-                <a:latin typeface="Courier New"/>
-                <a:cs typeface="Courier New"/>
-              </a:rPr>
-              <a:t> </a:t>
-            </a:r>
-            <a:r>
-              <a:rPr sz="2000" i="1" spc="-10" dirty="0">
-                <a:latin typeface="Times New Roman"/>
-                <a:cs typeface="Times New Roman"/>
-              </a:rPr>
-              <a:t>increment</a:t>
-            </a:r>
-            <a:r>
-              <a:rPr sz="2000" i="1" spc="-10" dirty="0">
-                <a:latin typeface="Courier New"/>
-                <a:cs typeface="Courier New"/>
-              </a:rPr>
-              <a:t>) </a:t>
-            </a:r>
-            <a:r>
-              <a:rPr sz="2000" i="1" spc="60" dirty="0">
-                <a:latin typeface="Times New Roman"/>
-                <a:cs typeface="Times New Roman"/>
-              </a:rPr>
-              <a:t>statement</a:t>
-            </a:r>
-            <a:endParaRPr sz="2000" dirty="0">
-              <a:latin typeface="Times New Roman"/>
-              <a:cs typeface="Times New Roman"/>
-            </a:endParaRPr>
-          </a:p>
-        </p:txBody>
-      </p:sp>
-      <p:sp>
-        <p:nvSpPr>
-          <p:cNvPr id="7" name="object 7"/>
-          <p:cNvSpPr txBox="1">
-            <a:spLocks noGrp="1"/>
-          </p:cNvSpPr>
-          <p:nvPr>
-            <p:ph type="ftr" sz="quarter" idx="5"/>
-          </p:nvPr>
-        </p:nvSpPr>
-        <p:spPr>
-          <a:prstGeom prst="rect">
-            <a:avLst/>
-          </a:prstGeom>
-        </p:spPr>
-        <p:txBody>
-          <a:bodyPr vert="horz" wrap="square" lIns="0" tIns="0" rIns="0" bIns="0" rtlCol="0">
-            <a:spAutoFit/>
-          </a:bodyPr>
-          <a:lstStyle/>
-          <a:p>
-            <a:pPr marL="12700">
-              <a:lnSpc>
-                <a:spcPts val="815"/>
-              </a:lnSpc>
-            </a:pPr>
-            <a:r>
-              <a:rPr spc="-35" dirty="0"/>
-              <a:t>Copyright</a:t>
-            </a:r>
-            <a:r>
-              <a:rPr spc="25" dirty="0"/>
-              <a:t> </a:t>
-            </a:r>
-            <a:r>
-              <a:rPr spc="75" dirty="0"/>
-              <a:t>©</a:t>
-            </a:r>
-            <a:r>
-              <a:rPr spc="-20" dirty="0"/>
-              <a:t> </a:t>
-            </a:r>
-            <a:r>
-              <a:rPr spc="-45" dirty="0"/>
-              <a:t>2020</a:t>
-            </a:r>
-            <a:r>
-              <a:rPr spc="-60" dirty="0"/>
-              <a:t> </a:t>
-            </a:r>
-            <a:r>
-              <a:rPr spc="-55" dirty="0"/>
-              <a:t>Pearson</a:t>
-            </a:r>
-            <a:r>
-              <a:rPr dirty="0"/>
-              <a:t> </a:t>
-            </a:r>
-            <a:r>
-              <a:rPr spc="-40" dirty="0"/>
-              <a:t>Education</a:t>
-            </a:r>
-            <a:r>
-              <a:rPr spc="60" dirty="0"/>
-              <a:t> </a:t>
-            </a:r>
-            <a:r>
-              <a:rPr spc="-25" dirty="0"/>
-              <a:t>Ltd.</a:t>
-            </a:r>
-            <a:r>
-              <a:rPr spc="35" dirty="0"/>
-              <a:t> </a:t>
-            </a:r>
-            <a:r>
-              <a:rPr spc="-10" dirty="0"/>
-              <a:t>All</a:t>
-            </a:r>
-            <a:r>
-              <a:rPr spc="-20" dirty="0"/>
-              <a:t> </a:t>
-            </a:r>
-            <a:r>
-              <a:rPr spc="-50" dirty="0"/>
-              <a:t>Rights</a:t>
-            </a:r>
-            <a:r>
-              <a:rPr spc="15" dirty="0"/>
-              <a:t> </a:t>
-            </a:r>
-            <a:r>
-              <a:rPr spc="-30" dirty="0"/>
-              <a:t>Reserved</a:t>
-            </a:r>
-          </a:p>
-        </p:txBody>
-      </p:sp>
-      <p:sp>
-        <p:nvSpPr>
-          <p:cNvPr id="4" name="object 4"/>
-          <p:cNvSpPr txBox="1"/>
-          <p:nvPr/>
-        </p:nvSpPr>
-        <p:spPr>
-          <a:xfrm>
-            <a:off x="2147316" y="3972242"/>
-            <a:ext cx="137160" cy="277495"/>
+            <a:off x="2061591" y="443547"/>
+            <a:ext cx="971550" cy="300355"/>
           </a:xfrm>
           <a:prstGeom prst="rect">
             <a:avLst/>
@@ -8905,221 +8662,161 @@
               </a:spcBef>
             </a:pPr>
             <a:r>
-              <a:rPr sz="1650" spc="-50" dirty="0">
-                <a:solidFill>
-                  <a:srgbClr val="2CA1BE"/>
-                </a:solidFill>
-                <a:latin typeface="Wingdings 3"/>
-                <a:cs typeface="Wingdings 3"/>
-              </a:rPr>
-              <a:t></a:t>
-            </a:r>
-            <a:endParaRPr sz="1650">
-              <a:latin typeface="Wingdings 3"/>
-              <a:cs typeface="Wingdings 3"/>
+              <a:rPr sz="1800" spc="-10" dirty="0">
+                <a:latin typeface="Arial"/>
+                <a:cs typeface="Arial"/>
+              </a:rPr>
+              <a:t>For1.java</a:t>
+            </a:r>
+            <a:endParaRPr sz="1800">
+              <a:latin typeface="Arial"/>
+              <a:cs typeface="Arial"/>
             </a:endParaRPr>
           </a:p>
         </p:txBody>
       </p:sp>
       <p:sp>
         <p:nvSpPr>
-          <p:cNvPr id="5" name="object 5"/>
+          <p:cNvPr id="4" name="object 4"/>
           <p:cNvSpPr txBox="1"/>
           <p:nvPr/>
         </p:nvSpPr>
         <p:spPr>
           <a:xfrm>
-            <a:off x="2348864" y="3903345"/>
-            <a:ext cx="6737350" cy="361950"/>
-          </a:xfrm>
-          <a:prstGeom prst="rect">
-            <a:avLst/>
-          </a:prstGeom>
-          <a:solidFill>
-            <a:srgbClr val="FFFF00"/>
-          </a:solidFill>
-        </p:spPr>
-        <p:txBody>
-          <a:bodyPr vert="horz" wrap="square" lIns="0" tIns="0" rIns="0" bIns="0" rtlCol="0">
-            <a:spAutoFit/>
-          </a:bodyPr>
-          <a:lstStyle/>
-          <a:p>
-            <a:pPr marL="1905">
-              <a:lnSpc>
-                <a:spcPts val="2775"/>
-              </a:lnSpc>
-            </a:pPr>
-            <a:r>
-              <a:rPr sz="2400" spc="65" dirty="0">
-                <a:latin typeface="Times New Roman"/>
-                <a:cs typeface="Times New Roman"/>
-              </a:rPr>
-              <a:t>The</a:t>
-            </a:r>
-            <a:r>
-              <a:rPr sz="2400" spc="-125" dirty="0">
-                <a:latin typeface="Times New Roman"/>
-                <a:cs typeface="Times New Roman"/>
-              </a:rPr>
-              <a:t> </a:t>
-            </a:r>
-            <a:r>
-              <a:rPr sz="2400" spc="114" dirty="0">
-                <a:latin typeface="Times New Roman"/>
-                <a:cs typeface="Times New Roman"/>
-              </a:rPr>
-              <a:t>two</a:t>
-            </a:r>
-            <a:r>
-              <a:rPr sz="2400" spc="-65" dirty="0">
-                <a:latin typeface="Times New Roman"/>
-                <a:cs typeface="Times New Roman"/>
-              </a:rPr>
-              <a:t> </a:t>
-            </a:r>
-            <a:r>
-              <a:rPr sz="2400" spc="70" dirty="0">
-                <a:latin typeface="Times New Roman"/>
-                <a:cs typeface="Times New Roman"/>
-              </a:rPr>
-              <a:t>semicolons</a:t>
-            </a:r>
-            <a:r>
-              <a:rPr sz="2400" spc="-200" dirty="0">
-                <a:latin typeface="Times New Roman"/>
-                <a:cs typeface="Times New Roman"/>
-              </a:rPr>
-              <a:t> </a:t>
-            </a:r>
-            <a:r>
-              <a:rPr sz="2400" spc="60" dirty="0">
-                <a:latin typeface="Times New Roman"/>
-                <a:cs typeface="Times New Roman"/>
-              </a:rPr>
-              <a:t>in</a:t>
-            </a:r>
-            <a:r>
-              <a:rPr sz="2400" spc="-50" dirty="0">
-                <a:latin typeface="Times New Roman"/>
-                <a:cs typeface="Times New Roman"/>
-              </a:rPr>
-              <a:t> </a:t>
-            </a:r>
-            <a:r>
-              <a:rPr sz="2400" spc="125" dirty="0">
-                <a:latin typeface="Times New Roman"/>
-                <a:cs typeface="Times New Roman"/>
-              </a:rPr>
-              <a:t>the</a:t>
-            </a:r>
-            <a:r>
-              <a:rPr sz="2400" spc="-60" dirty="0">
-                <a:latin typeface="Times New Roman"/>
-                <a:cs typeface="Times New Roman"/>
-              </a:rPr>
-              <a:t> </a:t>
-            </a:r>
-            <a:r>
-              <a:rPr sz="2400" spc="-114" dirty="0">
-                <a:latin typeface="Monaco"/>
-                <a:cs typeface="Monaco"/>
-              </a:rPr>
-              <a:t>for</a:t>
-            </a:r>
-            <a:r>
-              <a:rPr sz="2400" spc="-965" dirty="0">
-                <a:latin typeface="Monaco"/>
-                <a:cs typeface="Monaco"/>
-              </a:rPr>
-              <a:t> </a:t>
-            </a:r>
-            <a:r>
-              <a:rPr sz="2400" spc="145" dirty="0">
-                <a:latin typeface="Times New Roman"/>
-                <a:cs typeface="Times New Roman"/>
-              </a:rPr>
-              <a:t>header</a:t>
-            </a:r>
-            <a:r>
-              <a:rPr sz="2400" spc="-160" dirty="0">
-                <a:latin typeface="Times New Roman"/>
-                <a:cs typeface="Times New Roman"/>
-              </a:rPr>
-              <a:t> </a:t>
-            </a:r>
-            <a:r>
-              <a:rPr sz="2400" spc="135" dirty="0">
-                <a:latin typeface="Times New Roman"/>
-                <a:cs typeface="Times New Roman"/>
-              </a:rPr>
-              <a:t>are</a:t>
-            </a:r>
-            <a:r>
-              <a:rPr sz="2400" spc="-120" dirty="0">
-                <a:latin typeface="Times New Roman"/>
-                <a:cs typeface="Times New Roman"/>
-              </a:rPr>
-              <a:t> </a:t>
-            </a:r>
-            <a:r>
-              <a:rPr sz="2400" spc="90" dirty="0">
-                <a:latin typeface="Times New Roman"/>
-                <a:cs typeface="Times New Roman"/>
-              </a:rPr>
-              <a:t>required.</a:t>
-            </a:r>
-            <a:endParaRPr sz="2400" dirty="0">
-              <a:latin typeface="Times New Roman"/>
-              <a:cs typeface="Times New Roman"/>
-            </a:endParaRPr>
-          </a:p>
-        </p:txBody>
-      </p:sp>
-      <p:sp>
-        <p:nvSpPr>
-          <p:cNvPr id="6" name="object 6"/>
-          <p:cNvSpPr txBox="1"/>
-          <p:nvPr/>
-        </p:nvSpPr>
-        <p:spPr>
-          <a:xfrm>
-            <a:off x="2147316" y="4249102"/>
-            <a:ext cx="7639684" cy="380489"/>
+            <a:off x="688975" y="6614792"/>
+            <a:ext cx="2542540" cy="137795"/>
           </a:xfrm>
           <a:prstGeom prst="rect">
             <a:avLst/>
           </a:prstGeom>
         </p:spPr>
         <p:txBody>
-          <a:bodyPr vert="horz" wrap="square" lIns="0" tIns="47625" rIns="0" bIns="0" rtlCol="0">
+          <a:bodyPr vert="horz" wrap="square" lIns="0" tIns="8255" rIns="0" bIns="0" rtlCol="0">
             <a:spAutoFit/>
           </a:bodyPr>
           <a:lstStyle/>
           <a:p>
-            <a:pPr marL="12065" marR="5080">
+            <a:pPr marL="12700">
               <a:lnSpc>
-                <a:spcPct val="90400"/>
+                <a:spcPct val="100000"/>
               </a:lnSpc>
               <a:spcBef>
-                <a:spcPts val="375"/>
+                <a:spcPts val="65"/>
               </a:spcBef>
-              <a:buClr>
-                <a:srgbClr val="2CA1BE"/>
-              </a:buClr>
-              <a:buSzPct val="68750"/>
-              <a:tabLst>
-                <a:tab pos="203200" algn="l"/>
-              </a:tabLst>
             </a:pPr>
             <a:r>
-              <a:rPr lang="da-DK" sz="2400" spc="-45" dirty="0">
+              <a:rPr sz="750" dirty="0">
+                <a:latin typeface="Times New Roman"/>
+                <a:cs typeface="Times New Roman"/>
+              </a:rPr>
+              <a:t>Copyright</a:t>
+            </a:r>
+            <a:r>
+              <a:rPr sz="750" spc="-20" dirty="0">
                 <a:latin typeface="Times New Roman"/>
                 <a:cs typeface="Times New Roman"/>
               </a:rPr>
               <a:t> </a:t>
             </a:r>
-            <a:endParaRPr sz="2400" dirty="0">
+            <a:r>
+              <a:rPr sz="750" spc="60" dirty="0">
+                <a:latin typeface="Times New Roman"/>
+                <a:cs typeface="Times New Roman"/>
+              </a:rPr>
+              <a:t>©</a:t>
+            </a:r>
+            <a:r>
+              <a:rPr sz="750" spc="80" dirty="0">
+                <a:latin typeface="Times New Roman"/>
+                <a:cs typeface="Times New Roman"/>
+              </a:rPr>
+              <a:t> </a:t>
+            </a:r>
+            <a:r>
+              <a:rPr sz="750" spc="60" dirty="0">
+                <a:latin typeface="Times New Roman"/>
+                <a:cs typeface="Times New Roman"/>
+              </a:rPr>
+              <a:t>2020</a:t>
+            </a:r>
+            <a:r>
+              <a:rPr sz="750" spc="70" dirty="0">
+                <a:latin typeface="Times New Roman"/>
+                <a:cs typeface="Times New Roman"/>
+              </a:rPr>
+              <a:t> </a:t>
+            </a:r>
+            <a:r>
+              <a:rPr sz="750" dirty="0">
+                <a:latin typeface="Times New Roman"/>
+                <a:cs typeface="Times New Roman"/>
+              </a:rPr>
+              <a:t>Pearson</a:t>
+            </a:r>
+            <a:r>
+              <a:rPr sz="750" spc="75" dirty="0">
+                <a:latin typeface="Times New Roman"/>
+                <a:cs typeface="Times New Roman"/>
+              </a:rPr>
+              <a:t> </a:t>
+            </a:r>
+            <a:r>
+              <a:rPr sz="750" dirty="0">
+                <a:latin typeface="Times New Roman"/>
+                <a:cs typeface="Times New Roman"/>
+              </a:rPr>
+              <a:t>Education</a:t>
+            </a:r>
+            <a:r>
+              <a:rPr sz="750" spc="70" dirty="0">
+                <a:latin typeface="Times New Roman"/>
+                <a:cs typeface="Times New Roman"/>
+              </a:rPr>
+              <a:t> </a:t>
+            </a:r>
+            <a:r>
+              <a:rPr sz="750" spc="-20" dirty="0">
+                <a:latin typeface="Times New Roman"/>
+                <a:cs typeface="Times New Roman"/>
+              </a:rPr>
+              <a:t>Ltd.</a:t>
+            </a:r>
+            <a:r>
+              <a:rPr sz="750" spc="20" dirty="0">
+                <a:latin typeface="Times New Roman"/>
+                <a:cs typeface="Times New Roman"/>
+              </a:rPr>
+              <a:t> </a:t>
+            </a:r>
+            <a:r>
+              <a:rPr sz="750" spc="-30" dirty="0">
+                <a:latin typeface="Times New Roman"/>
+                <a:cs typeface="Times New Roman"/>
+              </a:rPr>
+              <a:t>All</a:t>
+            </a:r>
+            <a:r>
+              <a:rPr sz="750" spc="60" dirty="0">
+                <a:latin typeface="Times New Roman"/>
+                <a:cs typeface="Times New Roman"/>
+              </a:rPr>
+              <a:t> </a:t>
+            </a:r>
+            <a:r>
+              <a:rPr sz="750" dirty="0">
+                <a:latin typeface="Times New Roman"/>
+                <a:cs typeface="Times New Roman"/>
+              </a:rPr>
+              <a:t>Rights</a:t>
+            </a:r>
+            <a:r>
+              <a:rPr sz="750" spc="-10" dirty="0">
+                <a:latin typeface="Times New Roman"/>
+                <a:cs typeface="Times New Roman"/>
+              </a:rPr>
+              <a:t> Reserved</a:t>
+            </a:r>
+            <a:endParaRPr sz="750">
               <a:latin typeface="Times New Roman"/>
               <a:cs typeface="Times New Roman"/>
             </a:endParaRPr>
@@ -9186,7 +8883,31 @@
               <a:rPr lang="en-DK" dirty="0">
                 <a:latin typeface="Courier New" panose="02070309020205020404" pitchFamily="49" charset="0"/>
               </a:rPr>
-              <a:t>for (int i = 0; i &lt; 5; i++) {</a:t>
+              <a:t>for (int </a:t>
+            </a:r>
+            <a:r>
+              <a:rPr lang="en-DK" dirty="0">
+                <a:solidFill>
+                  <a:schemeClr val="accent1"/>
+                </a:solidFill>
+                <a:latin typeface="Courier New" panose="02070309020205020404" pitchFamily="49" charset="0"/>
+              </a:rPr>
+              <a:t>i</a:t>
+            </a:r>
+            <a:r>
+              <a:rPr lang="en-DK" dirty="0">
+                <a:latin typeface="Courier New" panose="02070309020205020404" pitchFamily="49" charset="0"/>
+              </a:rPr>
+              <a:t> = 0; i &lt; 5; i++) </a:t>
+            </a:r>
+            <a:r>
+              <a:rPr lang="en-DK" dirty="0">
+                <a:solidFill>
+                  <a:srgbClr val="FF0000"/>
+                </a:solidFill>
+                <a:latin typeface="Courier New" panose="02070309020205020404" pitchFamily="49" charset="0"/>
+              </a:rPr>
+              <a:t>{</a:t>
             </a:r>
           </a:p>
           <a:p>
@@ -9206,6 +8927,9 @@
             </a:pPr>
             <a:r>
               <a:rPr lang="en-DK" dirty="0">
+                <a:solidFill>
+                  <a:srgbClr val="FF0000"/>
+                </a:solidFill>
                 <a:latin typeface="Courier New" panose="02070309020205020404" pitchFamily="49" charset="0"/>
               </a:rPr>
               <a:t>}</a:t>
@@ -9227,7 +8951,22 @@
               <a:rPr lang="en-DK" dirty="0">
                 <a:latin typeface="Courier New" panose="02070309020205020404" pitchFamily="49" charset="0"/>
               </a:rPr>
-              <a:t>System.out.println(i); // ERROR</a:t>
+              <a:t>System.out.println(</a:t>
+            </a:r>
+            <a:r>
+              <a:rPr lang="en-DK" dirty="0">
+                <a:solidFill>
+                  <a:schemeClr val="accent1"/>
+                </a:solidFill>
+                <a:latin typeface="Courier New" panose="02070309020205020404" pitchFamily="49" charset="0"/>
+              </a:rPr>
+              <a:t>i</a:t>
+            </a:r>
+            <a:r>
+              <a:rPr lang="en-DK" dirty="0">
+                <a:latin typeface="Courier New" panose="02070309020205020404" pitchFamily="49" charset="0"/>
+              </a:rPr>
+              <a:t>); // ERROR</a:t>
             </a:r>
           </a:p>
         </p:txBody>
@@ -9580,7 +9319,7 @@
         <p:spPr>
           <a:xfrm>
             <a:off x="749300" y="1478216"/>
-            <a:ext cx="10666730" cy="2759075"/>
+            <a:ext cx="10666730" cy="2215094"/>
           </a:xfrm>
           <a:prstGeom prst="rect">
             <a:avLst/>
@@ -9624,27 +9363,27 @@
               <a:t> </a:t>
             </a:r>
             <a:r>
-              <a:rPr sz="2000" spc="105" dirty="0">
+              <a:rPr sz="2000" b="1" spc="105" dirty="0">
                 <a:latin typeface="Times New Roman"/>
                 <a:cs typeface="Times New Roman"/>
               </a:rPr>
               <a:t>interest</a:t>
             </a:r>
             <a:r>
-              <a:rPr sz="2000" spc="-45" dirty="0">
+              <a:rPr sz="2000" b="1" spc="-45" dirty="0">
                 <a:latin typeface="Times New Roman"/>
                 <a:cs typeface="Times New Roman"/>
               </a:rPr>
               <a:t> </a:t>
             </a:r>
             <a:r>
-              <a:rPr sz="2000" spc="60" dirty="0">
+              <a:rPr sz="2000" b="1" spc="60" dirty="0">
                 <a:latin typeface="Times New Roman"/>
                 <a:cs typeface="Times New Roman"/>
               </a:rPr>
               <a:t>application</a:t>
             </a:r>
-            <a:endParaRPr sz="2000">
+            <a:endParaRPr sz="2000" b="1" dirty="0">
               <a:latin typeface="Times New Roman"/>
               <a:cs typeface="Times New Roman"/>
             </a:endParaRPr>
@@ -9668,643 +9407,118 @@
               </a:tabLst>
             </a:pPr>
             <a:r>
+              <a:rPr lang="da-DK" sz="2000" i="1" dirty="0">
+                <a:latin typeface="Times New Roman"/>
+                <a:cs typeface="Times New Roman"/>
+              </a:rPr>
+              <a:t> </a:t>
+            </a:r>
+            <a:r>
+              <a:rPr sz="2000" i="1" spc="-25" dirty="0">
+                <a:latin typeface="Times New Roman"/>
+                <a:cs typeface="Times New Roman"/>
+              </a:rPr>
+              <a:t>Use</a:t>
+            </a:r>
+            <a:r>
+              <a:rPr sz="2000" i="1" spc="30" dirty="0">
+                <a:latin typeface="Times New Roman"/>
+                <a:cs typeface="Times New Roman"/>
+              </a:rPr>
+              <a:t> </a:t>
+            </a:r>
+            <a:r>
+              <a:rPr sz="2000" i="1" spc="65" dirty="0">
+                <a:latin typeface="Times New Roman"/>
+                <a:cs typeface="Times New Roman"/>
+              </a:rPr>
+              <a:t>the</a:t>
+            </a:r>
+            <a:r>
+              <a:rPr sz="2000" i="1" spc="30" dirty="0">
+                <a:latin typeface="Times New Roman"/>
+                <a:cs typeface="Times New Roman"/>
+              </a:rPr>
+              <a:t> </a:t>
+            </a:r>
+            <a:r>
               <a:rPr sz="2000" i="1" dirty="0">
                 <a:latin typeface="Times New Roman"/>
                 <a:cs typeface="Times New Roman"/>
               </a:rPr>
-              <a:t>A</a:t>
-            </a:r>
-            <a:r>
-              <a:rPr sz="2000" i="1" spc="30" dirty="0">
+              <a:t>following</a:t>
+            </a:r>
+            <a:r>
+              <a:rPr sz="2000" i="1" spc="-114" dirty="0">
                 <a:latin typeface="Times New Roman"/>
                 <a:cs typeface="Times New Roman"/>
               </a:rPr>
               <a:t> </a:t>
             </a:r>
             <a:r>
-              <a:rPr sz="2000" i="1" dirty="0">
-                <a:latin typeface="Times New Roman"/>
-                <a:cs typeface="Times New Roman"/>
-              </a:rPr>
-              <a:t>person</a:t>
+              <a:rPr sz="2000" i="1" spc="55" dirty="0">
+                <a:latin typeface="Times New Roman"/>
+                <a:cs typeface="Times New Roman"/>
+              </a:rPr>
+              <a:t>formula</a:t>
+            </a:r>
+            <a:r>
+              <a:rPr sz="2000" i="1" spc="-40" dirty="0">
+                <a:latin typeface="Times New Roman"/>
+                <a:cs typeface="Times New Roman"/>
+              </a:rPr>
+              <a:t> </a:t>
             </a:r>
             <a:r>
               <a:rPr sz="2000" i="1" spc="70" dirty="0">
                 <a:latin typeface="Times New Roman"/>
                 <a:cs typeface="Times New Roman"/>
               </a:rPr>
+              <a:t>to</a:t>
+            </a:r>
+            <a:r>
+              <a:rPr sz="2000" i="1" spc="-10" dirty="0">
+                <a:latin typeface="Times New Roman"/>
+                <a:cs typeface="Times New Roman"/>
+              </a:rPr>
               <a:t> </a:t>
             </a:r>
             <a:r>
-              <a:rPr sz="2000" i="1" dirty="0">
-                <a:latin typeface="Times New Roman"/>
-                <a:cs typeface="Times New Roman"/>
-              </a:rPr>
-              <a:t>invests</a:t>
-            </a:r>
-            <a:r>
-              <a:rPr sz="2000" i="1" spc="170" dirty="0">
+              <a:rPr sz="2000" i="1" spc="55" dirty="0">
+                <a:latin typeface="Times New Roman"/>
+                <a:cs typeface="Times New Roman"/>
+              </a:rPr>
+              <a:t>determine</a:t>
+            </a:r>
+            <a:r>
+              <a:rPr sz="2000" i="1" spc="110" dirty="0">
                 <a:latin typeface="Times New Roman"/>
                 <a:cs typeface="Times New Roman"/>
               </a:rPr>
               <a:t> </a:t>
             </a:r>
             <a:r>
-              <a:rPr sz="2000" i="1" dirty="0">
-                <a:latin typeface="Times New Roman"/>
-                <a:cs typeface="Times New Roman"/>
-              </a:rPr>
-              <a:t>$1,000</a:t>
-            </a:r>
-            <a:r>
-              <a:rPr sz="2000" i="1" spc="180" dirty="0">
+              <a:rPr sz="2000" i="1" spc="65" dirty="0">
+                <a:latin typeface="Times New Roman"/>
+                <a:cs typeface="Times New Roman"/>
+              </a:rPr>
+              <a:t>the</a:t>
+            </a:r>
+            <a:r>
+              <a:rPr sz="2000" i="1" spc="-55" dirty="0">
                 <a:latin typeface="Times New Roman"/>
                 <a:cs typeface="Times New Roman"/>
               </a:rPr>
               <a:t> </a:t>
             </a:r>
             <a:r>
-              <a:rPr sz="2000" i="1" dirty="0">
-                <a:latin typeface="Times New Roman"/>
-                <a:cs typeface="Times New Roman"/>
-              </a:rPr>
-              <a:t>in</a:t>
-            </a:r>
-            <a:r>
-              <a:rPr sz="2000" i="1" spc="-15" dirty="0">
-                <a:latin typeface="Times New Roman"/>
-                <a:cs typeface="Times New Roman"/>
-              </a:rPr>
-              <a:t> </a:t>
-            </a:r>
-            <a:r>
-              <a:rPr sz="2000" i="1" spc="60" dirty="0">
-                <a:latin typeface="Times New Roman"/>
-                <a:cs typeface="Times New Roman"/>
-              </a:rPr>
-              <a:t>a</a:t>
-            </a:r>
-            <a:r>
-              <a:rPr sz="2000" i="1" spc="95" dirty="0">
-                <a:latin typeface="Times New Roman"/>
-                <a:cs typeface="Times New Roman"/>
-              </a:rPr>
-              <a:t> </a:t>
-            </a:r>
-            <a:r>
-              <a:rPr sz="2000" i="1" dirty="0">
-                <a:latin typeface="Times New Roman"/>
-                <a:cs typeface="Times New Roman"/>
-              </a:rPr>
-              <a:t>savings</a:t>
-            </a:r>
-            <a:r>
-              <a:rPr sz="2000" i="1" spc="165" dirty="0">
-                <a:latin typeface="Times New Roman"/>
-                <a:cs typeface="Times New Roman"/>
-              </a:rPr>
-              <a:t> </a:t>
-            </a:r>
-            <a:r>
-              <a:rPr sz="2000" i="1" spc="45" dirty="0">
-                <a:latin typeface="Times New Roman"/>
-                <a:cs typeface="Times New Roman"/>
-              </a:rPr>
-              <a:t>account</a:t>
-            </a:r>
-            <a:r>
-              <a:rPr sz="2000" i="1" spc="-5" dirty="0">
-                <a:latin typeface="Times New Roman"/>
-                <a:cs typeface="Times New Roman"/>
-              </a:rPr>
-              <a:t> </a:t>
-            </a:r>
-            <a:r>
-              <a:rPr sz="2000" i="1" dirty="0">
-                <a:latin typeface="Times New Roman"/>
-                <a:cs typeface="Times New Roman"/>
-              </a:rPr>
-              <a:t>yielding</a:t>
-            </a:r>
-            <a:r>
-              <a:rPr sz="2000" i="1" spc="190" dirty="0">
-                <a:latin typeface="Times New Roman"/>
-                <a:cs typeface="Times New Roman"/>
-              </a:rPr>
-              <a:t> </a:t>
-            </a:r>
-            <a:r>
-              <a:rPr sz="2000" i="1" spc="55" dirty="0">
-                <a:latin typeface="Times New Roman"/>
-                <a:cs typeface="Times New Roman"/>
-              </a:rPr>
-              <a:t>5%</a:t>
-            </a:r>
-            <a:r>
-              <a:rPr sz="2000" i="1" spc="95" dirty="0">
-                <a:latin typeface="Times New Roman"/>
-                <a:cs typeface="Times New Roman"/>
-              </a:rPr>
-              <a:t> </a:t>
-            </a:r>
-            <a:r>
-              <a:rPr sz="2000" i="1" dirty="0">
-                <a:latin typeface="Times New Roman"/>
-                <a:cs typeface="Times New Roman"/>
-              </a:rPr>
-              <a:t>interest.</a:t>
-            </a:r>
-            <a:r>
-              <a:rPr sz="2000" i="1" spc="75" dirty="0">
-                <a:latin typeface="Times New Roman"/>
-                <a:cs typeface="Times New Roman"/>
-              </a:rPr>
-              <a:t> </a:t>
-            </a:r>
-            <a:r>
-              <a:rPr sz="2000" i="1" dirty="0">
-                <a:latin typeface="Times New Roman"/>
-                <a:cs typeface="Times New Roman"/>
-              </a:rPr>
-              <a:t>Assuming</a:t>
-            </a:r>
-            <a:r>
-              <a:rPr sz="2000" i="1" spc="190" dirty="0">
-                <a:latin typeface="Times New Roman"/>
-                <a:cs typeface="Times New Roman"/>
-              </a:rPr>
-              <a:t> </a:t>
-            </a:r>
-            <a:r>
-              <a:rPr sz="2000" i="1" spc="90" dirty="0">
-                <a:latin typeface="Times New Roman"/>
-                <a:cs typeface="Times New Roman"/>
-              </a:rPr>
-              <a:t>that</a:t>
-            </a:r>
-            <a:r>
-              <a:rPr sz="2000" i="1" spc="85" dirty="0">
-                <a:latin typeface="Times New Roman"/>
-                <a:cs typeface="Times New Roman"/>
-              </a:rPr>
-              <a:t> </a:t>
-            </a:r>
-            <a:r>
-              <a:rPr sz="2000" i="1" dirty="0">
-                <a:latin typeface="Times New Roman"/>
-                <a:cs typeface="Times New Roman"/>
-              </a:rPr>
-              <a:t>all</a:t>
-            </a:r>
-            <a:r>
-              <a:rPr sz="2000" i="1" spc="5" dirty="0">
-                <a:latin typeface="Times New Roman"/>
-                <a:cs typeface="Times New Roman"/>
-              </a:rPr>
-              <a:t> </a:t>
-            </a:r>
-            <a:r>
-              <a:rPr sz="2000" i="1" spc="65" dirty="0">
-                <a:latin typeface="Times New Roman"/>
-                <a:cs typeface="Times New Roman"/>
-              </a:rPr>
-              <a:t>the</a:t>
-            </a:r>
-            <a:r>
-              <a:rPr sz="2000" i="1" spc="85" dirty="0">
-                <a:latin typeface="Times New Roman"/>
-                <a:cs typeface="Times New Roman"/>
-              </a:rPr>
-              <a:t> </a:t>
-            </a:r>
-            <a:r>
-              <a:rPr sz="2000" i="1" dirty="0">
-                <a:latin typeface="Times New Roman"/>
-                <a:cs typeface="Times New Roman"/>
-              </a:rPr>
-              <a:t>interest</a:t>
-            </a:r>
-            <a:r>
-              <a:rPr sz="2000" i="1" spc="170" dirty="0">
-                <a:latin typeface="Times New Roman"/>
-                <a:cs typeface="Times New Roman"/>
-              </a:rPr>
-              <a:t> </a:t>
-            </a:r>
-            <a:r>
-              <a:rPr sz="2000" i="1" spc="-25" dirty="0">
-                <a:latin typeface="Times New Roman"/>
-                <a:cs typeface="Times New Roman"/>
-              </a:rPr>
-              <a:t>is </a:t>
-            </a:r>
-            <a:r>
-              <a:rPr sz="2000" i="1" dirty="0">
-                <a:latin typeface="Times New Roman"/>
-                <a:cs typeface="Times New Roman"/>
-              </a:rPr>
-              <a:t>left</a:t>
-            </a:r>
-            <a:r>
-              <a:rPr sz="2000" i="1" spc="80" dirty="0">
-                <a:latin typeface="Times New Roman"/>
-                <a:cs typeface="Times New Roman"/>
-              </a:rPr>
-              <a:t> </a:t>
-            </a:r>
-            <a:r>
-              <a:rPr sz="2000" i="1" spc="60" dirty="0">
-                <a:latin typeface="Times New Roman"/>
-                <a:cs typeface="Times New Roman"/>
-              </a:rPr>
-              <a:t>on</a:t>
-            </a:r>
-            <a:r>
-              <a:rPr sz="2000" i="1" spc="-20" dirty="0">
-                <a:latin typeface="Times New Roman"/>
-                <a:cs typeface="Times New Roman"/>
-              </a:rPr>
-              <a:t> </a:t>
-            </a:r>
-            <a:r>
-              <a:rPr sz="2000" i="1" dirty="0">
-                <a:latin typeface="Times New Roman"/>
-                <a:cs typeface="Times New Roman"/>
-              </a:rPr>
-              <a:t>deposit,</a:t>
-            </a:r>
-            <a:r>
-              <a:rPr sz="2000" i="1" spc="75" dirty="0">
-                <a:latin typeface="Times New Roman"/>
-                <a:cs typeface="Times New Roman"/>
-              </a:rPr>
-              <a:t> </a:t>
-            </a:r>
-            <a:r>
-              <a:rPr sz="2000" i="1" dirty="0">
-                <a:latin typeface="Times New Roman"/>
-                <a:cs typeface="Times New Roman"/>
-              </a:rPr>
-              <a:t>calculate</a:t>
-            </a:r>
-            <a:r>
-              <a:rPr sz="2000" i="1" spc="85" dirty="0">
-                <a:latin typeface="Times New Roman"/>
-                <a:cs typeface="Times New Roman"/>
-              </a:rPr>
-              <a:t> </a:t>
-            </a:r>
-            <a:r>
-              <a:rPr sz="2000" i="1" spc="50" dirty="0">
-                <a:latin typeface="Times New Roman"/>
-                <a:cs typeface="Times New Roman"/>
-              </a:rPr>
-              <a:t>and</a:t>
-            </a:r>
-            <a:r>
-              <a:rPr sz="2000" i="1" spc="95" dirty="0">
-                <a:latin typeface="Times New Roman"/>
-                <a:cs typeface="Times New Roman"/>
-              </a:rPr>
-              <a:t> </a:t>
-            </a:r>
-            <a:r>
-              <a:rPr sz="2000" i="1" dirty="0">
-                <a:latin typeface="Times New Roman"/>
-                <a:cs typeface="Times New Roman"/>
-              </a:rPr>
-              <a:t>print</a:t>
-            </a:r>
-            <a:r>
-              <a:rPr sz="2000" i="1" spc="85" dirty="0">
-                <a:latin typeface="Times New Roman"/>
-                <a:cs typeface="Times New Roman"/>
-              </a:rPr>
-              <a:t> </a:t>
-            </a:r>
-            <a:r>
-              <a:rPr sz="2000" i="1" spc="65" dirty="0">
-                <a:latin typeface="Times New Roman"/>
-                <a:cs typeface="Times New Roman"/>
-              </a:rPr>
-              <a:t>the</a:t>
-            </a:r>
-            <a:r>
-              <a:rPr sz="2000" i="1" spc="80" dirty="0">
-                <a:latin typeface="Times New Roman"/>
-                <a:cs typeface="Times New Roman"/>
-              </a:rPr>
-              <a:t> </a:t>
-            </a:r>
-            <a:r>
-              <a:rPr sz="2000" i="1" spc="85" dirty="0">
-                <a:latin typeface="Times New Roman"/>
-                <a:cs typeface="Times New Roman"/>
-              </a:rPr>
-              <a:t>amount</a:t>
-            </a:r>
-            <a:r>
-              <a:rPr sz="2000" i="1" spc="-5" dirty="0">
-                <a:latin typeface="Times New Roman"/>
-                <a:cs typeface="Times New Roman"/>
-              </a:rPr>
-              <a:t> </a:t>
-            </a:r>
-            <a:r>
-              <a:rPr sz="2000" i="1" dirty="0">
-                <a:latin typeface="Times New Roman"/>
-                <a:cs typeface="Times New Roman"/>
-              </a:rPr>
-              <a:t>of</a:t>
-            </a:r>
-            <a:r>
-              <a:rPr sz="2000" i="1" spc="25" dirty="0">
-                <a:latin typeface="Times New Roman"/>
-                <a:cs typeface="Times New Roman"/>
-              </a:rPr>
-              <a:t> </a:t>
-            </a:r>
-            <a:r>
-              <a:rPr sz="2000" i="1" spc="65" dirty="0">
-                <a:latin typeface="Times New Roman"/>
-                <a:cs typeface="Times New Roman"/>
-              </a:rPr>
-              <a:t>money</a:t>
-            </a:r>
-            <a:r>
-              <a:rPr sz="2000" i="1" spc="-15" dirty="0">
-                <a:latin typeface="Times New Roman"/>
-                <a:cs typeface="Times New Roman"/>
-              </a:rPr>
-              <a:t> </a:t>
-            </a:r>
-            <a:r>
-              <a:rPr sz="2000" i="1" dirty="0">
-                <a:latin typeface="Times New Roman"/>
-                <a:cs typeface="Times New Roman"/>
-              </a:rPr>
-              <a:t>in</a:t>
-            </a:r>
-            <a:r>
-              <a:rPr sz="2000" i="1" spc="70" dirty="0">
-                <a:latin typeface="Times New Roman"/>
-                <a:cs typeface="Times New Roman"/>
-              </a:rPr>
-              <a:t> </a:t>
-            </a:r>
-            <a:r>
-              <a:rPr sz="2000" i="1" spc="65" dirty="0">
-                <a:latin typeface="Times New Roman"/>
-                <a:cs typeface="Times New Roman"/>
-              </a:rPr>
-              <a:t>the</a:t>
-            </a:r>
-            <a:r>
-              <a:rPr sz="2000" i="1" spc="80" dirty="0">
-                <a:latin typeface="Times New Roman"/>
-                <a:cs typeface="Times New Roman"/>
-              </a:rPr>
-              <a:t> </a:t>
-            </a:r>
-            <a:r>
-              <a:rPr sz="2000" i="1" spc="45" dirty="0">
-                <a:latin typeface="Times New Roman"/>
-                <a:cs typeface="Times New Roman"/>
-              </a:rPr>
-              <a:t>account</a:t>
-            </a:r>
-            <a:r>
-              <a:rPr sz="2000" i="1" spc="-5" dirty="0">
-                <a:latin typeface="Times New Roman"/>
-                <a:cs typeface="Times New Roman"/>
-              </a:rPr>
-              <a:t> </a:t>
-            </a:r>
-            <a:r>
-              <a:rPr sz="2000" i="1" spc="95" dirty="0">
-                <a:latin typeface="Times New Roman"/>
-                <a:cs typeface="Times New Roman"/>
-              </a:rPr>
-              <a:t>at</a:t>
-            </a:r>
-            <a:r>
-              <a:rPr sz="2000" i="1" spc="-5" dirty="0">
-                <a:latin typeface="Times New Roman"/>
-                <a:cs typeface="Times New Roman"/>
-              </a:rPr>
-              <a:t> </a:t>
-            </a:r>
-            <a:r>
-              <a:rPr sz="2000" i="1" spc="65" dirty="0">
-                <a:latin typeface="Times New Roman"/>
-                <a:cs typeface="Times New Roman"/>
-              </a:rPr>
-              <a:t>the</a:t>
-            </a:r>
-            <a:r>
-              <a:rPr sz="2000" i="1" spc="80" dirty="0">
-                <a:latin typeface="Times New Roman"/>
-                <a:cs typeface="Times New Roman"/>
-              </a:rPr>
-              <a:t> </a:t>
-            </a:r>
-            <a:r>
-              <a:rPr sz="2000" i="1" dirty="0">
-                <a:latin typeface="Times New Roman"/>
-                <a:cs typeface="Times New Roman"/>
-              </a:rPr>
-              <a:t>end</a:t>
-            </a:r>
-            <a:r>
-              <a:rPr sz="2000" i="1" spc="100" dirty="0">
-                <a:latin typeface="Times New Roman"/>
-                <a:cs typeface="Times New Roman"/>
-              </a:rPr>
-              <a:t> </a:t>
-            </a:r>
-            <a:r>
-              <a:rPr sz="2000" i="1" dirty="0">
-                <a:latin typeface="Times New Roman"/>
-                <a:cs typeface="Times New Roman"/>
-              </a:rPr>
-              <a:t>of</a:t>
-            </a:r>
-            <a:r>
-              <a:rPr sz="2000" i="1" spc="25" dirty="0">
-                <a:latin typeface="Times New Roman"/>
-                <a:cs typeface="Times New Roman"/>
-              </a:rPr>
-              <a:t> </a:t>
-            </a:r>
-            <a:r>
-              <a:rPr sz="2000" i="1" dirty="0">
-                <a:latin typeface="Times New Roman"/>
-                <a:cs typeface="Times New Roman"/>
-              </a:rPr>
-              <a:t>each</a:t>
-            </a:r>
-            <a:r>
-              <a:rPr sz="2000" i="1" spc="-5" dirty="0">
-                <a:latin typeface="Times New Roman"/>
-                <a:cs typeface="Times New Roman"/>
-              </a:rPr>
-              <a:t> </a:t>
-            </a:r>
-            <a:r>
-              <a:rPr sz="2000" i="1" dirty="0">
-                <a:latin typeface="Times New Roman"/>
-                <a:cs typeface="Times New Roman"/>
-              </a:rPr>
-              <a:t>year</a:t>
-            </a:r>
-            <a:r>
-              <a:rPr sz="2000" i="1" spc="110" dirty="0">
-                <a:latin typeface="Times New Roman"/>
-                <a:cs typeface="Times New Roman"/>
-              </a:rPr>
-              <a:t> </a:t>
-            </a:r>
-            <a:r>
-              <a:rPr sz="2000" i="1" spc="-25" dirty="0">
-                <a:latin typeface="Times New Roman"/>
-                <a:cs typeface="Times New Roman"/>
-              </a:rPr>
-              <a:t>for </a:t>
-            </a:r>
-            <a:r>
-              <a:rPr sz="2000" i="1" spc="55" dirty="0">
-                <a:latin typeface="Times New Roman"/>
-                <a:cs typeface="Times New Roman"/>
-              </a:rPr>
-              <a:t>10</a:t>
-            </a:r>
-            <a:r>
-              <a:rPr sz="2000" i="1" spc="25" dirty="0">
-                <a:latin typeface="Times New Roman"/>
-                <a:cs typeface="Times New Roman"/>
-              </a:rPr>
-              <a:t> </a:t>
-            </a:r>
-            <a:r>
-              <a:rPr sz="2000" i="1" dirty="0">
-                <a:latin typeface="Times New Roman"/>
-                <a:cs typeface="Times New Roman"/>
-              </a:rPr>
-              <a:t>years.</a:t>
-            </a:r>
-            <a:r>
-              <a:rPr sz="2000" i="1" spc="25" dirty="0">
-                <a:latin typeface="Times New Roman"/>
-                <a:cs typeface="Times New Roman"/>
-              </a:rPr>
-              <a:t> </a:t>
-            </a:r>
-            <a:r>
-              <a:rPr sz="2000" i="1" spc="-25" dirty="0">
-                <a:latin typeface="Times New Roman"/>
-                <a:cs typeface="Times New Roman"/>
-              </a:rPr>
-              <a:t>Use</a:t>
-            </a:r>
-            <a:r>
-              <a:rPr sz="2000" i="1" spc="30" dirty="0">
-                <a:latin typeface="Times New Roman"/>
-                <a:cs typeface="Times New Roman"/>
-              </a:rPr>
-              <a:t> </a:t>
-            </a:r>
-            <a:r>
-              <a:rPr sz="2000" i="1" spc="65" dirty="0">
-                <a:latin typeface="Times New Roman"/>
-                <a:cs typeface="Times New Roman"/>
-              </a:rPr>
-              <a:t>the</a:t>
-            </a:r>
-            <a:r>
-              <a:rPr sz="2000" i="1" spc="30" dirty="0">
-                <a:latin typeface="Times New Roman"/>
-                <a:cs typeface="Times New Roman"/>
-              </a:rPr>
-              <a:t> </a:t>
-            </a:r>
-            <a:r>
-              <a:rPr sz="2000" i="1" dirty="0">
-                <a:latin typeface="Times New Roman"/>
-                <a:cs typeface="Times New Roman"/>
-              </a:rPr>
-              <a:t>following</a:t>
-            </a:r>
-            <a:r>
-              <a:rPr sz="2000" i="1" spc="-114" dirty="0">
-                <a:latin typeface="Times New Roman"/>
-                <a:cs typeface="Times New Roman"/>
-              </a:rPr>
-              <a:t> </a:t>
-            </a:r>
-            <a:r>
-              <a:rPr sz="2000" i="1" spc="55" dirty="0">
-                <a:latin typeface="Times New Roman"/>
-                <a:cs typeface="Times New Roman"/>
-              </a:rPr>
-              <a:t>formula</a:t>
-            </a:r>
-            <a:r>
-              <a:rPr sz="2000" i="1" spc="-40" dirty="0">
-                <a:latin typeface="Times New Roman"/>
-                <a:cs typeface="Times New Roman"/>
-              </a:rPr>
-              <a:t> </a:t>
-            </a:r>
-            <a:r>
-              <a:rPr sz="2000" i="1" spc="70" dirty="0">
-                <a:latin typeface="Times New Roman"/>
-                <a:cs typeface="Times New Roman"/>
-              </a:rPr>
-              <a:t>to</a:t>
-            </a:r>
-            <a:r>
               <a:rPr sz="2000" i="1" spc="-10" dirty="0">
                 <a:latin typeface="Times New Roman"/>
                 <a:cs typeface="Times New Roman"/>
               </a:rPr>
-              <a:t> </a:t>
-            </a:r>
-            <a:r>
-              <a:rPr sz="2000" i="1" spc="55" dirty="0">
-                <a:latin typeface="Times New Roman"/>
-                <a:cs typeface="Times New Roman"/>
-              </a:rPr>
-              <a:t>determine</a:t>
-            </a:r>
-            <a:r>
-              <a:rPr sz="2000" i="1" spc="110" dirty="0">
-                <a:latin typeface="Times New Roman"/>
-                <a:cs typeface="Times New Roman"/>
-              </a:rPr>
-              <a:t> </a:t>
-            </a:r>
-            <a:r>
-              <a:rPr sz="2000" i="1" spc="65" dirty="0">
-                <a:latin typeface="Times New Roman"/>
-                <a:cs typeface="Times New Roman"/>
-              </a:rPr>
-              <a:t>the</a:t>
-            </a:r>
-            <a:r>
-              <a:rPr sz="2000" i="1" spc="-55" dirty="0">
-                <a:latin typeface="Times New Roman"/>
-                <a:cs typeface="Times New Roman"/>
-              </a:rPr>
-              <a:t> </a:t>
-            </a:r>
-            <a:r>
-              <a:rPr sz="2000" i="1" spc="-10" dirty="0">
-                <a:latin typeface="Times New Roman"/>
-                <a:cs typeface="Times New Roman"/>
-              </a:rPr>
               <a:t>amounts:</a:t>
             </a:r>
-            <a:endParaRPr sz="2000">
+            <a:endParaRPr sz="2000" dirty="0">
               <a:latin typeface="Times New Roman"/>
               <a:cs typeface="Times New Roman"/>
             </a:endParaRPr>
@@ -10402,7 +9616,7 @@
               </a:rPr>
               <a:t>n</a:t>
             </a:r>
-            <a:endParaRPr sz="1650" baseline="27777">
+            <a:endParaRPr sz="1650" baseline="27777" dirty="0">
               <a:latin typeface="Times New Roman"/>
               <a:cs typeface="Times New Roman"/>
             </a:endParaRPr>
@@ -10423,7 +9637,7 @@
               </a:rPr>
               <a:t>where</a:t>
             </a:r>
-            <a:endParaRPr sz="2000">
+            <a:endParaRPr sz="2000" dirty="0">
               <a:latin typeface="Times New Roman"/>
               <a:cs typeface="Times New Roman"/>
             </a:endParaRPr>
@@ -10696,7 +9910,7 @@
               </a:rPr>
               <a:t>5%)</a:t>
             </a:r>
-            <a:endParaRPr sz="1700">
+            <a:endParaRPr sz="1700" dirty="0">
               <a:latin typeface="Times New Roman"/>
               <a:cs typeface="Times New Roman"/>
             </a:endParaRPr>
@@ -10777,7 +9991,7 @@
               </a:rPr>
               <a:t>years</a:t>
             </a:r>
-            <a:endParaRPr sz="1700">
+            <a:endParaRPr sz="1700" dirty="0">
               <a:latin typeface="Times New Roman"/>
               <a:cs typeface="Times New Roman"/>
             </a:endParaRPr>
@@ -10963,7 +10177,7 @@
               </a:rPr>
               <a:t>year.</a:t>
             </a:r>
-            <a:endParaRPr sz="1700">
+            <a:endParaRPr sz="1700" dirty="0">
               <a:latin typeface="Times New Roman"/>
               <a:cs typeface="Times New Roman"/>
             </a:endParaRPr>
@@ -11314,6 +10528,203 @@
 </file>
 
 <file path=ppt/slides/slide16.xml><?xml version="1.0" encoding="utf-8"?>
+<p:sld xmlns:a="http://schemas.openxmlformats.org/drawingml/2006/main" xmlns:r="http://schemas.openxmlformats.org/officeDocument/2006/relationships" xmlns:p="http://schemas.openxmlformats.org/presentationml/2006/main" show="0">
+  <p:cSld>
+    <p:bg>
+      <p:bgPr>
+        <a:solidFill>
+          <a:schemeClr val="bg1"/>
+        </a:solidFill>
+        <a:effectLst/>
+      </p:bgPr>
+    </p:bg>
+    <p:spTree>
+      <p:nvGrpSpPr>
+        <p:cNvPr id="1" name=""/>
+        <p:cNvGrpSpPr/>
+        <p:nvPr/>
+      </p:nvGrpSpPr>
+      <p:grpSpPr>
+        <a:xfrm>
+          <a:off x="0" y="0"/>
+          <a:ext cx="0" cy="0"/>
+          <a:chOff x="0" y="0"/>
+          <a:chExt cx="0" cy="0"/>
+        </a:xfrm>
+      </p:grpSpPr>
+      <p:sp>
+        <p:nvSpPr>
+          <p:cNvPr id="9" name="Rectangle 8">
+            <a:extLst>
+              <a:ext uri="{FF2B5EF4-FFF2-40B4-BE49-F238E27FC236}">
+                <a16:creationId xmlns:a16="http://schemas.microsoft.com/office/drawing/2014/main" id="{A4AC5506-6312-4701-8D3C-40187889A947}"/>
+              </a:ext>
+              <a:ext uri="{C183D7F6-B498-43B3-948B-1728B52AA6E4}">
+                <adec:decorative xmlns:adec="http://schemas.microsoft.com/office/drawing/2017/decorative" val="1"/>
+              </a:ext>
+            </a:extLst>
+          </p:cNvPr>
+          <p:cNvSpPr>
+            <a:spLocks noGrp="1" noRot="1" noChangeAspect="1" noMove="1" noResize="1" noEditPoints="1" noAdjustHandles="1" noChangeArrowheads="1" noChangeShapeType="1" noTextEdit="1"/>
+          </p:cNvSpPr>
+          <p:nvPr>
+            <p:extLst>
+              <p:ext uri="{386F3935-93C4-4BCD-93E2-E3B085C9AB24}">
+                <p16:designElem xmlns:p16="http://schemas.microsoft.com/office/powerpoint/2015/main" val="1"/>
+              </p:ext>
+            </p:extLst>
+          </p:nvPr>
+        </p:nvSpPr>
+        <p:spPr>
+          <a:xfrm>
+            <a:off x="0" y="651752"/>
+            <a:ext cx="12192000" cy="736551"/>
+          </a:xfrm>
+          <a:prstGeom prst="rect">
+            <a:avLst/>
+          </a:prstGeom>
+          <a:solidFill>
+            <a:schemeClr val="tx1"/>
+          </a:solidFill>
+          <a:ln>
+            <a:noFill/>
+          </a:ln>
+        </p:spPr>
+        <p:style>
+          <a:lnRef idx="2">
+            <a:schemeClr val="accent1">
+              <a:shade val="50000"/>
+            </a:schemeClr>
+          </a:lnRef>
+          <a:fillRef idx="1">
+            <a:schemeClr val="accent1"/>
+          </a:fillRef>
+          <a:effectRef idx="0">
+            <a:schemeClr val="accent1"/>
+          </a:effectRef>
+          <a:fontRef idx="minor">
+            <a:schemeClr val="lt1"/>
+          </a:fontRef>
+        </p:style>
+        <p:txBody>
+          <a:bodyPr rtlCol="0" anchor="ctr"/>
+          <a:lstStyle/>
+          <a:p>
+            <a:pPr algn="ctr"/>
+            <a:endParaRPr lang="en-US"/>
+          </a:p>
+        </p:txBody>
+      </p:sp>
+      <p:sp>
+        <p:nvSpPr>
+          <p:cNvPr id="2" name="object 3">
+            <a:extLst>
+              <a:ext uri="{FF2B5EF4-FFF2-40B4-BE49-F238E27FC236}">
+                <a16:creationId xmlns:a16="http://schemas.microsoft.com/office/drawing/2014/main" id="{24420BE4-BC1A-C2BC-922E-ED1CE70BCAE3}"/>
+              </a:ext>
+            </a:extLst>
+          </p:cNvPr>
+          <p:cNvSpPr txBox="1"/>
+          <p:nvPr/>
+        </p:nvSpPr>
+        <p:spPr>
+          <a:xfrm>
+            <a:off x="556532" y="643467"/>
+            <a:ext cx="11210925" cy="744836"/>
+          </a:xfrm>
+          <a:prstGeom prst="rect">
+            <a:avLst/>
+          </a:prstGeom>
+        </p:spPr>
+        <p:txBody>
+          <a:bodyPr vert="horz" lIns="91440" tIns="45720" rIns="91440" bIns="45720" rtlCol="0" anchor="ctr">
+            <a:normAutofit/>
+          </a:bodyPr>
+          <a:lstStyle/>
+          <a:p>
+            <a:pPr marL="12700" algn="ctr" rtl="0">
+              <a:lnSpc>
+                <a:spcPct val="90000"/>
+              </a:lnSpc>
+              <a:spcBef>
+                <a:spcPct val="0"/>
+              </a:spcBef>
+              <a:spcAft>
+                <a:spcPts val="600"/>
+              </a:spcAft>
+            </a:pPr>
+            <a:r>
+              <a:rPr lang="en-US" sz="3200" kern="1200" spc="-10" dirty="0">
+                <a:solidFill>
+                  <a:schemeClr val="bg1"/>
+                </a:solidFill>
+                <a:latin typeface="+mj-lt"/>
+                <a:ea typeface="+mj-ea"/>
+                <a:cs typeface="+mj-cs"/>
+              </a:rPr>
+              <a:t>Enhanced for  (foreach)</a:t>
+            </a:r>
+            <a:endParaRPr lang="en-US" sz="3200" kern="1200" dirty="0">
+              <a:solidFill>
+                <a:schemeClr val="bg1"/>
+              </a:solidFill>
+              <a:latin typeface="+mj-lt"/>
+              <a:ea typeface="+mj-ea"/>
+              <a:cs typeface="+mj-cs"/>
+            </a:endParaRPr>
+          </a:p>
+        </p:txBody>
+      </p:sp>
+      <p:pic>
+        <p:nvPicPr>
+          <p:cNvPr id="4" name="Picture 3">
+            <a:extLst>
+              <a:ext uri="{FF2B5EF4-FFF2-40B4-BE49-F238E27FC236}">
+                <a16:creationId xmlns:a16="http://schemas.microsoft.com/office/drawing/2014/main" id="{B3D8A7BE-BB54-FA10-5C69-8E5EA02CE3BB}"/>
+              </a:ext>
+            </a:extLst>
+          </p:cNvPr>
+          <p:cNvPicPr>
+            <a:picLocks noChangeAspect="1"/>
+          </p:cNvPicPr>
+          <p:nvPr/>
+        </p:nvPicPr>
+        <p:blipFill>
+          <a:blip r:embed="rId2">
+            <a:extLst>
+              <a:ext uri="{28A0092B-C50C-407E-A947-70E740481C1C}">
+                <a14:useLocalDpi xmlns:a14="http://schemas.microsoft.com/office/drawing/2010/main" val="0"/>
+              </a:ext>
+            </a:extLst>
+          </a:blip>
+          <a:stretch>
+            <a:fillRect/>
+          </a:stretch>
+        </p:blipFill>
+        <p:spPr>
+          <a:xfrm>
+            <a:off x="2741650" y="1675227"/>
+            <a:ext cx="6708699" cy="4394199"/>
+          </a:xfrm>
+          <a:prstGeom prst="rect">
+            <a:avLst/>
+          </a:prstGeom>
+        </p:spPr>
+      </p:pic>
+    </p:spTree>
+    <p:extLst>
+      <p:ext uri="{BB962C8B-B14F-4D97-AF65-F5344CB8AC3E}">
+        <p14:creationId xmlns:p14="http://schemas.microsoft.com/office/powerpoint/2010/main" val="3608031895"/>
+      </p:ext>
+    </p:extLst>
+  </p:cSld>
+  <p:clrMapOvr>
+    <a:masterClrMapping/>
+  </p:clrMapOvr>
+</p:sld>
+</file>
+
+<file path=ppt/slides/slide17.xml><?xml version="1.0" encoding="utf-8"?>
 <p:sld xmlns:a="http://schemas.openxmlformats.org/drawingml/2006/main" xmlns:r="http://schemas.openxmlformats.org/officeDocument/2006/relationships" xmlns:p="http://schemas.openxmlformats.org/presentationml/2006/main">
   <p:cSld>
     <p:spTree>
@@ -11817,7 +11228,7 @@
 </p:sld>
 </file>
 
-<file path=ppt/slides/slide17.xml><?xml version="1.0" encoding="utf-8"?>
+<file path=ppt/slides/slide18.xml><?xml version="1.0" encoding="utf-8"?>
 <p:sld xmlns:a="http://schemas.openxmlformats.org/drawingml/2006/main" xmlns:r="http://schemas.openxmlformats.org/officeDocument/2006/relationships" xmlns:p="http://schemas.openxmlformats.org/presentationml/2006/main">
   <p:cSld>
     <p:spTree>
@@ -12018,7 +11429,7 @@
 </p:sld>
 </file>
 
-<file path=ppt/slides/slide18.xml><?xml version="1.0" encoding="utf-8"?>
+<file path=ppt/slides/slide19.xml><?xml version="1.0" encoding="utf-8"?>
 <p:sld xmlns:a="http://schemas.openxmlformats.org/drawingml/2006/main" xmlns:r="http://schemas.openxmlformats.org/officeDocument/2006/relationships" xmlns:p="http://schemas.openxmlformats.org/presentationml/2006/main">
   <p:cSld>
     <p:spTree>
@@ -12218,460 +11629,6 @@
 </p:sld>
 </file>
 
-<file path=ppt/slides/slide19.xml><?xml version="1.0" encoding="utf-8"?>
-<p:sld xmlns:a="http://schemas.openxmlformats.org/drawingml/2006/main" xmlns:r="http://schemas.openxmlformats.org/officeDocument/2006/relationships" xmlns:p="http://schemas.openxmlformats.org/presentationml/2006/main">
-  <p:cSld>
-    <p:spTree>
-      <p:nvGrpSpPr>
-        <p:cNvPr id="1" name=""/>
-        <p:cNvGrpSpPr/>
-        <p:nvPr/>
-      </p:nvGrpSpPr>
-      <p:grpSpPr>
-        <a:xfrm>
-          <a:off x="0" y="0"/>
-          <a:ext cx="0" cy="0"/>
-          <a:chOff x="0" y="0"/>
-          <a:chExt cx="0" cy="0"/>
-        </a:xfrm>
-      </p:grpSpPr>
-      <p:sp>
-        <p:nvSpPr>
-          <p:cNvPr id="2" name="Text 0"/>
-          <p:cNvSpPr/>
-          <p:nvPr/>
-        </p:nvSpPr>
-        <p:spPr>
-          <a:xfrm>
-            <a:off x="548640" y="384048"/>
-            <a:ext cx="7315200" cy="320040"/>
-          </a:xfrm>
-          <a:prstGeom prst="rect">
-            <a:avLst/>
-          </a:prstGeom>
-          <a:noFill/>
-          <a:ln/>
-        </p:spPr>
-        <p:txBody>
-          <a:bodyPr wrap="square" rtlCol="0" anchor="ctr"/>
-          <a:lstStyle/>
-          <a:p>
-            <a:pPr marL="0" indent="0">
-              <a:buNone/>
-            </a:pPr>
-            <a:r>
-              <a:rPr lang="en-US" sz="1300" b="1" kern="0" spc="200" dirty="0">
-                <a:solidFill>
-                  <a:srgbClr val="028090"/>
-                </a:solidFill>
-                <a:latin typeface="Calibri" pitchFamily="34" charset="0"/>
-                <a:ea typeface="Calibri" pitchFamily="34" charset="-122"/>
-                <a:cs typeface="Calibri" pitchFamily="34" charset="-120"/>
-              </a:rPr>
-              <a:t>COMPARE</a:t>
-            </a:r>
-            <a:endParaRPr lang="en-US" sz="1300" dirty="0"/>
-          </a:p>
-        </p:txBody>
-      </p:sp>
-      <p:sp>
-        <p:nvSpPr>
-          <p:cNvPr id="3" name="Text 1"/>
-          <p:cNvSpPr/>
-          <p:nvPr/>
-        </p:nvSpPr>
-        <p:spPr>
-          <a:xfrm>
-            <a:off x="548640" y="713232"/>
-            <a:ext cx="10515600" cy="822960"/>
-          </a:xfrm>
-          <a:prstGeom prst="rect">
-            <a:avLst/>
-          </a:prstGeom>
-          <a:noFill/>
-          <a:ln/>
-        </p:spPr>
-        <p:txBody>
-          <a:bodyPr wrap="square" rtlCol="0" anchor="ctr"/>
-          <a:lstStyle/>
-          <a:p>
-            <a:pPr marL="0" indent="0">
-              <a:buNone/>
-            </a:pPr>
-            <a:r>
-              <a:rPr lang="en-US" sz="3200" b="1" dirty="0">
-                <a:solidFill>
-                  <a:srgbClr val="17262A"/>
-                </a:solidFill>
-                <a:latin typeface="Cambria" pitchFamily="34" charset="0"/>
-                <a:ea typeface="Cambria" pitchFamily="34" charset="-122"/>
-                <a:cs typeface="Cambria" pitchFamily="34" charset="-120"/>
-              </a:rPr>
-              <a:t>for vs. while</a:t>
-            </a:r>
-            <a:endParaRPr lang="en-US" sz="3200" dirty="0"/>
-          </a:p>
-        </p:txBody>
-      </p:sp>
-      <p:sp>
-        <p:nvSpPr>
-          <p:cNvPr id="4" name="Shape 2"/>
-          <p:cNvSpPr/>
-          <p:nvPr/>
-        </p:nvSpPr>
-        <p:spPr>
-          <a:xfrm>
-            <a:off x="548640" y="1554480"/>
-            <a:ext cx="5120640" cy="3200400"/>
-          </a:xfrm>
-          <a:prstGeom prst="roundRect">
-            <a:avLst>
-              <a:gd name="adj" fmla="val 2857"/>
-            </a:avLst>
-          </a:prstGeom>
-          <a:solidFill>
-            <a:srgbClr val="F3F7F7"/>
-          </a:solidFill>
-          <a:ln/>
-        </p:spPr>
-        <p:txBody>
-          <a:bodyPr/>
-          <a:lstStyle/>
-          <a:p>
-            <a:endParaRPr lang="en-DK"/>
-          </a:p>
-        </p:txBody>
-      </p:sp>
-      <p:sp>
-        <p:nvSpPr>
-          <p:cNvPr id="5" name="Shape 3"/>
-          <p:cNvSpPr/>
-          <p:nvPr/>
-        </p:nvSpPr>
-        <p:spPr>
-          <a:xfrm>
-            <a:off x="6035040" y="1554480"/>
-            <a:ext cx="5120640" cy="3200400"/>
-          </a:xfrm>
-          <a:prstGeom prst="roundRect">
-            <a:avLst>
-              <a:gd name="adj" fmla="val 2857"/>
-            </a:avLst>
-          </a:prstGeom>
-          <a:solidFill>
-            <a:srgbClr val="012A2D"/>
-          </a:solidFill>
-          <a:ln/>
-        </p:spPr>
-        <p:txBody>
-          <a:bodyPr/>
-          <a:lstStyle/>
-          <a:p>
-            <a:endParaRPr lang="en-DK"/>
-          </a:p>
-        </p:txBody>
-      </p:sp>
-      <p:sp>
-        <p:nvSpPr>
-          <p:cNvPr id="6" name="Text 4"/>
-          <p:cNvSpPr/>
-          <p:nvPr/>
-        </p:nvSpPr>
-        <p:spPr>
-          <a:xfrm>
-            <a:off x="822960" y="1783080"/>
-            <a:ext cx="4572000" cy="411480"/>
-          </a:xfrm>
-          <a:prstGeom prst="rect">
-            <a:avLst/>
-          </a:prstGeom>
-          <a:noFill/>
-          <a:ln/>
-        </p:spPr>
-        <p:txBody>
-          <a:bodyPr wrap="square" rtlCol="0" anchor="ctr"/>
-          <a:lstStyle/>
-          <a:p>
-            <a:pPr marL="0" indent="0">
-              <a:buNone/>
-            </a:pPr>
-            <a:r>
-              <a:rPr lang="en-US" sz="2200" b="1" dirty="0">
-                <a:solidFill>
-                  <a:srgbClr val="028090"/>
-                </a:solidFill>
-                <a:latin typeface="Courier New" pitchFamily="34" charset="0"/>
-                <a:ea typeface="Courier New" pitchFamily="34" charset="-122"/>
-                <a:cs typeface="Courier New" pitchFamily="34" charset="-120"/>
-              </a:rPr>
-              <a:t>for</a:t>
-            </a:r>
-            <a:endParaRPr lang="en-US" sz="2200" dirty="0"/>
-          </a:p>
-        </p:txBody>
-      </p:sp>
-      <p:sp>
-        <p:nvSpPr>
-          <p:cNvPr id="7" name="Text 5"/>
-          <p:cNvSpPr/>
-          <p:nvPr/>
-        </p:nvSpPr>
-        <p:spPr>
-          <a:xfrm>
-            <a:off x="6309360" y="1783080"/>
-            <a:ext cx="4572000" cy="411480"/>
-          </a:xfrm>
-          <a:prstGeom prst="rect">
-            <a:avLst/>
-          </a:prstGeom>
-          <a:noFill/>
-          <a:ln/>
-        </p:spPr>
-        <p:txBody>
-          <a:bodyPr wrap="square" rtlCol="0" anchor="ctr"/>
-          <a:lstStyle/>
-          <a:p>
-            <a:pPr marL="0" indent="0">
-              <a:buNone/>
-            </a:pPr>
-            <a:r>
-              <a:rPr lang="en-US" sz="2200" b="1" dirty="0">
-                <a:solidFill>
-                  <a:srgbClr val="02C39A"/>
-                </a:solidFill>
-                <a:latin typeface="Courier New" pitchFamily="34" charset="0"/>
-                <a:ea typeface="Courier New" pitchFamily="34" charset="-122"/>
-                <a:cs typeface="Courier New" pitchFamily="34" charset="-120"/>
-              </a:rPr>
-              <a:t>while</a:t>
-            </a:r>
-            <a:endParaRPr lang="en-US" sz="2200" dirty="0"/>
-          </a:p>
-        </p:txBody>
-      </p:sp>
-      <p:sp>
-        <p:nvSpPr>
-          <p:cNvPr id="8" name="Text 6"/>
-          <p:cNvSpPr/>
-          <p:nvPr/>
-        </p:nvSpPr>
-        <p:spPr>
-          <a:xfrm>
-            <a:off x="822960" y="2331720"/>
-            <a:ext cx="4572000" cy="2194560"/>
-          </a:xfrm>
-          <a:prstGeom prst="rect">
-            <a:avLst/>
-          </a:prstGeom>
-          <a:noFill/>
-          <a:ln/>
-        </p:spPr>
-        <p:txBody>
-          <a:bodyPr wrap="square" rtlCol="0" anchor="t"/>
-          <a:lstStyle/>
-          <a:p>
-            <a:pPr marL="0" indent="0">
-              <a:lnSpc>
-                <a:spcPct val="145000"/>
-              </a:lnSpc>
-              <a:buNone/>
-            </a:pPr>
-            <a:r>
-              <a:rPr lang="en-US" sz="2000" b="1" dirty="0">
-                <a:solidFill>
-                  <a:srgbClr val="028090"/>
-                </a:solidFill>
-                <a:latin typeface="Calibri" pitchFamily="34" charset="0"/>
-                <a:ea typeface="Calibri" pitchFamily="34" charset="-122"/>
-                <a:cs typeface="Calibri" pitchFamily="34" charset="-120"/>
-              </a:rPr>
-              <a:t>•  </a:t>
-            </a:r>
-            <a:r>
-              <a:rPr lang="en-US" sz="2000" dirty="0">
-                <a:solidFill>
-                  <a:srgbClr val="17262A"/>
-                </a:solidFill>
-                <a:latin typeface="Calibri" pitchFamily="34" charset="0"/>
-                <a:ea typeface="Calibri" pitchFamily="34" charset="-122"/>
-                <a:cs typeface="Calibri" pitchFamily="34" charset="-120"/>
-              </a:rPr>
-              <a:t>Best when the iteration count is known up front
-</a:t>
-            </a:r>
-            <a:r>
-              <a:rPr lang="en-US" sz="2000" b="1" dirty="0">
-                <a:solidFill>
-                  <a:srgbClr val="028090"/>
-                </a:solidFill>
-                <a:latin typeface="Calibri" pitchFamily="34" charset="0"/>
-                <a:ea typeface="Calibri" pitchFamily="34" charset="-122"/>
-                <a:cs typeface="Calibri" pitchFamily="34" charset="-120"/>
-              </a:rPr>
-              <a:t>•  </a:t>
-            </a:r>
-            <a:r>
-              <a:rPr lang="en-US" sz="2000" dirty="0">
-                <a:solidFill>
-                  <a:srgbClr val="17262A"/>
-                </a:solidFill>
-                <a:latin typeface="Calibri" pitchFamily="34" charset="0"/>
-                <a:ea typeface="Calibri" pitchFamily="34" charset="-122"/>
-                <a:cs typeface="Calibri" pitchFamily="34" charset="-120"/>
-              </a:rPr>
-              <a:t>Initialization, condition, increment sit in one header
-</a:t>
-            </a:r>
-            <a:r>
-              <a:rPr lang="en-US" sz="2000" b="1" dirty="0">
-                <a:solidFill>
-                  <a:srgbClr val="028090"/>
-                </a:solidFill>
-                <a:latin typeface="Calibri" pitchFamily="34" charset="0"/>
-                <a:ea typeface="Calibri" pitchFamily="34" charset="-122"/>
-                <a:cs typeface="Calibri" pitchFamily="34" charset="-120"/>
-              </a:rPr>
-              <a:t> </a:t>
-            </a:r>
-            <a:endParaRPr lang="en-US" sz="2000" dirty="0"/>
-          </a:p>
-        </p:txBody>
-      </p:sp>
-      <p:sp>
-        <p:nvSpPr>
-          <p:cNvPr id="9" name="Text 7"/>
-          <p:cNvSpPr/>
-          <p:nvPr/>
-        </p:nvSpPr>
-        <p:spPr>
-          <a:xfrm>
-            <a:off x="6309360" y="2331720"/>
-            <a:ext cx="4572000" cy="2194560"/>
-          </a:xfrm>
-          <a:prstGeom prst="rect">
-            <a:avLst/>
-          </a:prstGeom>
-          <a:noFill/>
-          <a:ln/>
-        </p:spPr>
-        <p:txBody>
-          <a:bodyPr wrap="square" rtlCol="0" anchor="t"/>
-          <a:lstStyle/>
-          <a:p>
-            <a:pPr marL="0" indent="0">
-              <a:lnSpc>
-                <a:spcPct val="145000"/>
-              </a:lnSpc>
-              <a:buNone/>
-            </a:pPr>
-            <a:r>
-              <a:rPr lang="en-US" sz="2000" b="1" dirty="0">
-                <a:solidFill>
-                  <a:srgbClr val="02C39A"/>
-                </a:solidFill>
-                <a:latin typeface="Calibri" pitchFamily="34" charset="0"/>
-                <a:ea typeface="Calibri" pitchFamily="34" charset="-122"/>
-                <a:cs typeface="Calibri" pitchFamily="34" charset="-120"/>
-              </a:rPr>
-              <a:t>•  </a:t>
-            </a:r>
-            <a:r>
-              <a:rPr lang="en-US" sz="2000" dirty="0">
-                <a:solidFill>
-                  <a:srgbClr val="E9F6F3"/>
-                </a:solidFill>
-                <a:latin typeface="Calibri" pitchFamily="34" charset="0"/>
-                <a:ea typeface="Calibri" pitchFamily="34" charset="-122"/>
-                <a:cs typeface="Calibri" pitchFamily="34" charset="-120"/>
-              </a:rPr>
-              <a:t>General purpose — works for any condition
-</a:t>
-            </a:r>
-            <a:r>
-              <a:rPr lang="en-US" sz="2000" b="1" dirty="0">
-                <a:solidFill>
-                  <a:srgbClr val="02C39A"/>
-                </a:solidFill>
-                <a:latin typeface="Calibri" pitchFamily="34" charset="0"/>
-                <a:ea typeface="Calibri" pitchFamily="34" charset="-122"/>
-                <a:cs typeface="Calibri" pitchFamily="34" charset="-120"/>
-              </a:rPr>
-              <a:t>•  </a:t>
-            </a:r>
-            <a:r>
-              <a:rPr lang="en-US" sz="2000" dirty="0">
-                <a:solidFill>
-                  <a:srgbClr val="E9F6F3"/>
-                </a:solidFill>
-                <a:latin typeface="Calibri" pitchFamily="34" charset="0"/>
-                <a:ea typeface="Calibri" pitchFamily="34" charset="-122"/>
-                <a:cs typeface="Calibri" pitchFamily="34" charset="-120"/>
-              </a:rPr>
-              <a:t>Natural fit for sentinel-controlled loops</a:t>
-            </a:r>
-            <a:r>
-              <a:rPr lang="en-US" sz="1300" dirty="0">
-                <a:solidFill>
-                  <a:srgbClr val="E9F6F3"/>
-                </a:solidFill>
-                <a:latin typeface="Calibri" pitchFamily="34" charset="0"/>
-                <a:ea typeface="Calibri" pitchFamily="34" charset="-122"/>
-                <a:cs typeface="Calibri" pitchFamily="34" charset="-120"/>
-              </a:rPr>
-              <a:t>
-</a:t>
-            </a:r>
-            <a:endParaRPr lang="en-US" sz="1300" dirty="0"/>
-          </a:p>
-        </p:txBody>
-      </p:sp>
-      <p:sp>
-        <p:nvSpPr>
-          <p:cNvPr id="10" name="Text 8"/>
-          <p:cNvSpPr/>
-          <p:nvPr/>
-        </p:nvSpPr>
-        <p:spPr>
-          <a:xfrm>
-            <a:off x="11475720" y="6510528"/>
-            <a:ext cx="640080" cy="274320"/>
-          </a:xfrm>
-          <a:prstGeom prst="rect">
-            <a:avLst/>
-          </a:prstGeom>
-          <a:noFill/>
-          <a:ln/>
-        </p:spPr>
-        <p:txBody>
-          <a:bodyPr wrap="square" rtlCol="0" anchor="ctr"/>
-          <a:lstStyle/>
-          <a:p>
-            <a:pPr marL="0" indent="0" algn="r">
-              <a:buNone/>
-            </a:pPr>
-            <a:r>
-              <a:rPr lang="en-US" sz="1000" dirty="0">
-                <a:solidFill>
-                  <a:srgbClr val="51696C"/>
-                </a:solidFill>
-                <a:latin typeface="Calibri" pitchFamily="34" charset="0"/>
-                <a:ea typeface="Calibri" pitchFamily="34" charset="-122"/>
-                <a:cs typeface="Calibri" pitchFamily="34" charset="-120"/>
-              </a:rPr>
-              <a:t>13 / 14</a:t>
-            </a:r>
-            <a:endParaRPr lang="en-US" sz="1000" dirty="0"/>
-          </a:p>
-        </p:txBody>
-      </p:sp>
-    </p:spTree>
-  </p:cSld>
-  <p:clrMapOvr>
-    <a:masterClrMapping/>
-  </p:clrMapOvr>
-</p:sld>
-</file>
-
 <file path=ppt/slides/slide2.xml><?xml version="1.0" encoding="utf-8"?>
 <p:sld xmlns:a="http://schemas.openxmlformats.org/drawingml/2006/main" xmlns:r="http://schemas.openxmlformats.org/officeDocument/2006/relationships" xmlns:p="http://schemas.openxmlformats.org/presentationml/2006/main">
   <p:cSld>
@@ -13439,6 +12396,460 @@
       </p:grpSpPr>
       <p:sp>
         <p:nvSpPr>
+          <p:cNvPr id="2" name="Text 0"/>
+          <p:cNvSpPr/>
+          <p:nvPr/>
+        </p:nvSpPr>
+        <p:spPr>
+          <a:xfrm>
+            <a:off x="548640" y="384048"/>
+            <a:ext cx="7315200" cy="320040"/>
+          </a:xfrm>
+          <a:prstGeom prst="rect">
+            <a:avLst/>
+          </a:prstGeom>
+          <a:noFill/>
+          <a:ln/>
+        </p:spPr>
+        <p:txBody>
+          <a:bodyPr wrap="square" rtlCol="0" anchor="ctr"/>
+          <a:lstStyle/>
+          <a:p>
+            <a:pPr marL="0" indent="0">
+              <a:buNone/>
+            </a:pPr>
+            <a:r>
+              <a:rPr lang="en-US" sz="1300" b="1" kern="0" spc="200" dirty="0">
+                <a:solidFill>
+                  <a:srgbClr val="028090"/>
+                </a:solidFill>
+                <a:latin typeface="Calibri" pitchFamily="34" charset="0"/>
+                <a:ea typeface="Calibri" pitchFamily="34" charset="-122"/>
+                <a:cs typeface="Calibri" pitchFamily="34" charset="-120"/>
+              </a:rPr>
+              <a:t>COMPARE</a:t>
+            </a:r>
+            <a:endParaRPr lang="en-US" sz="1300" dirty="0"/>
+          </a:p>
+        </p:txBody>
+      </p:sp>
+      <p:sp>
+        <p:nvSpPr>
+          <p:cNvPr id="3" name="Text 1"/>
+          <p:cNvSpPr/>
+          <p:nvPr/>
+        </p:nvSpPr>
+        <p:spPr>
+          <a:xfrm>
+            <a:off x="548640" y="713232"/>
+            <a:ext cx="10515600" cy="822960"/>
+          </a:xfrm>
+          <a:prstGeom prst="rect">
+            <a:avLst/>
+          </a:prstGeom>
+          <a:noFill/>
+          <a:ln/>
+        </p:spPr>
+        <p:txBody>
+          <a:bodyPr wrap="square" rtlCol="0" anchor="ctr"/>
+          <a:lstStyle/>
+          <a:p>
+            <a:pPr marL="0" indent="0">
+              <a:buNone/>
+            </a:pPr>
+            <a:r>
+              <a:rPr lang="en-US" sz="3200" b="1" dirty="0">
+                <a:solidFill>
+                  <a:srgbClr val="17262A"/>
+                </a:solidFill>
+                <a:latin typeface="Cambria" pitchFamily="34" charset="0"/>
+                <a:ea typeface="Cambria" pitchFamily="34" charset="-122"/>
+                <a:cs typeface="Cambria" pitchFamily="34" charset="-120"/>
+              </a:rPr>
+              <a:t>for vs. while</a:t>
+            </a:r>
+            <a:endParaRPr lang="en-US" sz="3200" dirty="0"/>
+          </a:p>
+        </p:txBody>
+      </p:sp>
+      <p:sp>
+        <p:nvSpPr>
+          <p:cNvPr id="4" name="Shape 2"/>
+          <p:cNvSpPr/>
+          <p:nvPr/>
+        </p:nvSpPr>
+        <p:spPr>
+          <a:xfrm>
+            <a:off x="548640" y="1554480"/>
+            <a:ext cx="5120640" cy="3200400"/>
+          </a:xfrm>
+          <a:prstGeom prst="roundRect">
+            <a:avLst>
+              <a:gd name="adj" fmla="val 2857"/>
+            </a:avLst>
+          </a:prstGeom>
+          <a:solidFill>
+            <a:srgbClr val="F3F7F7"/>
+          </a:solidFill>
+          <a:ln/>
+        </p:spPr>
+        <p:txBody>
+          <a:bodyPr/>
+          <a:lstStyle/>
+          <a:p>
+            <a:endParaRPr lang="en-DK"/>
+          </a:p>
+        </p:txBody>
+      </p:sp>
+      <p:sp>
+        <p:nvSpPr>
+          <p:cNvPr id="5" name="Shape 3"/>
+          <p:cNvSpPr/>
+          <p:nvPr/>
+        </p:nvSpPr>
+        <p:spPr>
+          <a:xfrm>
+            <a:off x="6035040" y="1554480"/>
+            <a:ext cx="5120640" cy="3200400"/>
+          </a:xfrm>
+          <a:prstGeom prst="roundRect">
+            <a:avLst>
+              <a:gd name="adj" fmla="val 2857"/>
+            </a:avLst>
+          </a:prstGeom>
+          <a:solidFill>
+            <a:srgbClr val="012A2D"/>
+          </a:solidFill>
+          <a:ln/>
+        </p:spPr>
+        <p:txBody>
+          <a:bodyPr/>
+          <a:lstStyle/>
+          <a:p>
+            <a:endParaRPr lang="en-DK"/>
+          </a:p>
+        </p:txBody>
+      </p:sp>
+      <p:sp>
+        <p:nvSpPr>
+          <p:cNvPr id="6" name="Text 4"/>
+          <p:cNvSpPr/>
+          <p:nvPr/>
+        </p:nvSpPr>
+        <p:spPr>
+          <a:xfrm>
+            <a:off x="822960" y="1783080"/>
+            <a:ext cx="4572000" cy="411480"/>
+          </a:xfrm>
+          <a:prstGeom prst="rect">
+            <a:avLst/>
+          </a:prstGeom>
+          <a:noFill/>
+          <a:ln/>
+        </p:spPr>
+        <p:txBody>
+          <a:bodyPr wrap="square" rtlCol="0" anchor="ctr"/>
+          <a:lstStyle/>
+          <a:p>
+            <a:pPr marL="0" indent="0">
+              <a:buNone/>
+            </a:pPr>
+            <a:r>
+              <a:rPr lang="en-US" sz="2200" b="1" dirty="0">
+                <a:solidFill>
+                  <a:srgbClr val="028090"/>
+                </a:solidFill>
+                <a:latin typeface="Courier New" pitchFamily="34" charset="0"/>
+                <a:ea typeface="Courier New" pitchFamily="34" charset="-122"/>
+                <a:cs typeface="Courier New" pitchFamily="34" charset="-120"/>
+              </a:rPr>
+              <a:t>for</a:t>
+            </a:r>
+            <a:endParaRPr lang="en-US" sz="2200" dirty="0"/>
+          </a:p>
+        </p:txBody>
+      </p:sp>
+      <p:sp>
+        <p:nvSpPr>
+          <p:cNvPr id="7" name="Text 5"/>
+          <p:cNvSpPr/>
+          <p:nvPr/>
+        </p:nvSpPr>
+        <p:spPr>
+          <a:xfrm>
+            <a:off x="6309360" y="1783080"/>
+            <a:ext cx="4572000" cy="411480"/>
+          </a:xfrm>
+          <a:prstGeom prst="rect">
+            <a:avLst/>
+          </a:prstGeom>
+          <a:noFill/>
+          <a:ln/>
+        </p:spPr>
+        <p:txBody>
+          <a:bodyPr wrap="square" rtlCol="0" anchor="ctr"/>
+          <a:lstStyle/>
+          <a:p>
+            <a:pPr marL="0" indent="0">
+              <a:buNone/>
+            </a:pPr>
+            <a:r>
+              <a:rPr lang="en-US" sz="2200" b="1" dirty="0">
+                <a:solidFill>
+                  <a:srgbClr val="02C39A"/>
+                </a:solidFill>
+                <a:latin typeface="Courier New" pitchFamily="34" charset="0"/>
+                <a:ea typeface="Courier New" pitchFamily="34" charset="-122"/>
+                <a:cs typeface="Courier New" pitchFamily="34" charset="-120"/>
+              </a:rPr>
+              <a:t>while</a:t>
+            </a:r>
+            <a:endParaRPr lang="en-US" sz="2200" dirty="0"/>
+          </a:p>
+        </p:txBody>
+      </p:sp>
+      <p:sp>
+        <p:nvSpPr>
+          <p:cNvPr id="8" name="Text 6"/>
+          <p:cNvSpPr/>
+          <p:nvPr/>
+        </p:nvSpPr>
+        <p:spPr>
+          <a:xfrm>
+            <a:off x="822960" y="2331720"/>
+            <a:ext cx="4572000" cy="2194560"/>
+          </a:xfrm>
+          <a:prstGeom prst="rect">
+            <a:avLst/>
+          </a:prstGeom>
+          <a:noFill/>
+          <a:ln/>
+        </p:spPr>
+        <p:txBody>
+          <a:bodyPr wrap="square" rtlCol="0" anchor="t"/>
+          <a:lstStyle/>
+          <a:p>
+            <a:pPr marL="0" indent="0">
+              <a:lnSpc>
+                <a:spcPct val="145000"/>
+              </a:lnSpc>
+              <a:buNone/>
+            </a:pPr>
+            <a:r>
+              <a:rPr lang="en-US" sz="2000" b="1" dirty="0">
+                <a:solidFill>
+                  <a:srgbClr val="028090"/>
+                </a:solidFill>
+                <a:latin typeface="Calibri" pitchFamily="34" charset="0"/>
+                <a:ea typeface="Calibri" pitchFamily="34" charset="-122"/>
+                <a:cs typeface="Calibri" pitchFamily="34" charset="-120"/>
+              </a:rPr>
+              <a:t>•  </a:t>
+            </a:r>
+            <a:r>
+              <a:rPr lang="en-US" sz="2000" dirty="0">
+                <a:solidFill>
+                  <a:srgbClr val="17262A"/>
+                </a:solidFill>
+                <a:latin typeface="Calibri" pitchFamily="34" charset="0"/>
+                <a:ea typeface="Calibri" pitchFamily="34" charset="-122"/>
+                <a:cs typeface="Calibri" pitchFamily="34" charset="-120"/>
+              </a:rPr>
+              <a:t>Best when the iteration count is known up front
+</a:t>
+            </a:r>
+            <a:r>
+              <a:rPr lang="en-US" sz="2000" b="1" dirty="0">
+                <a:solidFill>
+                  <a:srgbClr val="028090"/>
+                </a:solidFill>
+                <a:latin typeface="Calibri" pitchFamily="34" charset="0"/>
+                <a:ea typeface="Calibri" pitchFamily="34" charset="-122"/>
+                <a:cs typeface="Calibri" pitchFamily="34" charset="-120"/>
+              </a:rPr>
+              <a:t>•  </a:t>
+            </a:r>
+            <a:r>
+              <a:rPr lang="en-US" sz="2000" dirty="0">
+                <a:solidFill>
+                  <a:srgbClr val="17262A"/>
+                </a:solidFill>
+                <a:latin typeface="Calibri" pitchFamily="34" charset="0"/>
+                <a:ea typeface="Calibri" pitchFamily="34" charset="-122"/>
+                <a:cs typeface="Calibri" pitchFamily="34" charset="-120"/>
+              </a:rPr>
+              <a:t>Initialization, condition, increment sit in one header
+</a:t>
+            </a:r>
+            <a:r>
+              <a:rPr lang="en-US" sz="2000" b="1" dirty="0">
+                <a:solidFill>
+                  <a:srgbClr val="028090"/>
+                </a:solidFill>
+                <a:latin typeface="Calibri" pitchFamily="34" charset="0"/>
+                <a:ea typeface="Calibri" pitchFamily="34" charset="-122"/>
+                <a:cs typeface="Calibri" pitchFamily="34" charset="-120"/>
+              </a:rPr>
+              <a:t> </a:t>
+            </a:r>
+            <a:endParaRPr lang="en-US" sz="2000" dirty="0"/>
+          </a:p>
+        </p:txBody>
+      </p:sp>
+      <p:sp>
+        <p:nvSpPr>
+          <p:cNvPr id="9" name="Text 7"/>
+          <p:cNvSpPr/>
+          <p:nvPr/>
+        </p:nvSpPr>
+        <p:spPr>
+          <a:xfrm>
+            <a:off x="6309360" y="2331720"/>
+            <a:ext cx="4572000" cy="2194560"/>
+          </a:xfrm>
+          <a:prstGeom prst="rect">
+            <a:avLst/>
+          </a:prstGeom>
+          <a:noFill/>
+          <a:ln/>
+        </p:spPr>
+        <p:txBody>
+          <a:bodyPr wrap="square" rtlCol="0" anchor="t"/>
+          <a:lstStyle/>
+          <a:p>
+            <a:pPr marL="0" indent="0">
+              <a:lnSpc>
+                <a:spcPct val="145000"/>
+              </a:lnSpc>
+              <a:buNone/>
+            </a:pPr>
+            <a:r>
+              <a:rPr lang="en-US" sz="2000" b="1" dirty="0">
+                <a:solidFill>
+                  <a:srgbClr val="02C39A"/>
+                </a:solidFill>
+                <a:latin typeface="Calibri" pitchFamily="34" charset="0"/>
+                <a:ea typeface="Calibri" pitchFamily="34" charset="-122"/>
+                <a:cs typeface="Calibri" pitchFamily="34" charset="-120"/>
+              </a:rPr>
+              <a:t>•  </a:t>
+            </a:r>
+            <a:r>
+              <a:rPr lang="en-US" sz="2000" dirty="0">
+                <a:solidFill>
+                  <a:srgbClr val="E9F6F3"/>
+                </a:solidFill>
+                <a:latin typeface="Calibri" pitchFamily="34" charset="0"/>
+                <a:ea typeface="Calibri" pitchFamily="34" charset="-122"/>
+                <a:cs typeface="Calibri" pitchFamily="34" charset="-120"/>
+              </a:rPr>
+              <a:t>General purpose — works for any condition
+</a:t>
+            </a:r>
+            <a:r>
+              <a:rPr lang="en-US" sz="2000" b="1" dirty="0">
+                <a:solidFill>
+                  <a:srgbClr val="02C39A"/>
+                </a:solidFill>
+                <a:latin typeface="Calibri" pitchFamily="34" charset="0"/>
+                <a:ea typeface="Calibri" pitchFamily="34" charset="-122"/>
+                <a:cs typeface="Calibri" pitchFamily="34" charset="-120"/>
+              </a:rPr>
+              <a:t>•  </a:t>
+            </a:r>
+            <a:r>
+              <a:rPr lang="en-US" sz="2000" dirty="0">
+                <a:solidFill>
+                  <a:srgbClr val="E9F6F3"/>
+                </a:solidFill>
+                <a:latin typeface="Calibri" pitchFamily="34" charset="0"/>
+                <a:ea typeface="Calibri" pitchFamily="34" charset="-122"/>
+                <a:cs typeface="Calibri" pitchFamily="34" charset="-120"/>
+              </a:rPr>
+              <a:t>Natural fit for sentinel-controlled loops</a:t>
+            </a:r>
+            <a:r>
+              <a:rPr lang="en-US" sz="1300" dirty="0">
+                <a:solidFill>
+                  <a:srgbClr val="E9F6F3"/>
+                </a:solidFill>
+                <a:latin typeface="Calibri" pitchFamily="34" charset="0"/>
+                <a:ea typeface="Calibri" pitchFamily="34" charset="-122"/>
+                <a:cs typeface="Calibri" pitchFamily="34" charset="-120"/>
+              </a:rPr>
+              <a:t>
+</a:t>
+            </a:r>
+            <a:endParaRPr lang="en-US" sz="1300" dirty="0"/>
+          </a:p>
+        </p:txBody>
+      </p:sp>
+      <p:sp>
+        <p:nvSpPr>
+          <p:cNvPr id="10" name="Text 8"/>
+          <p:cNvSpPr/>
+          <p:nvPr/>
+        </p:nvSpPr>
+        <p:spPr>
+          <a:xfrm>
+            <a:off x="11475720" y="6510528"/>
+            <a:ext cx="640080" cy="274320"/>
+          </a:xfrm>
+          <a:prstGeom prst="rect">
+            <a:avLst/>
+          </a:prstGeom>
+          <a:noFill/>
+          <a:ln/>
+        </p:spPr>
+        <p:txBody>
+          <a:bodyPr wrap="square" rtlCol="0" anchor="ctr"/>
+          <a:lstStyle/>
+          <a:p>
+            <a:pPr marL="0" indent="0" algn="r">
+              <a:buNone/>
+            </a:pPr>
+            <a:r>
+              <a:rPr lang="en-US" sz="1000" dirty="0">
+                <a:solidFill>
+                  <a:srgbClr val="51696C"/>
+                </a:solidFill>
+                <a:latin typeface="Calibri" pitchFamily="34" charset="0"/>
+                <a:ea typeface="Calibri" pitchFamily="34" charset="-122"/>
+                <a:cs typeface="Calibri" pitchFamily="34" charset="-120"/>
+              </a:rPr>
+              <a:t>13 / 14</a:t>
+            </a:r>
+            <a:endParaRPr lang="en-US" sz="1000" dirty="0"/>
+          </a:p>
+        </p:txBody>
+      </p:sp>
+    </p:spTree>
+  </p:cSld>
+  <p:clrMapOvr>
+    <a:masterClrMapping/>
+  </p:clrMapOvr>
+</p:sld>
+</file>
+
+<file path=ppt/slides/slide21.xml><?xml version="1.0" encoding="utf-8"?>
+<p:sld xmlns:a="http://schemas.openxmlformats.org/drawingml/2006/main" xmlns:r="http://schemas.openxmlformats.org/officeDocument/2006/relationships" xmlns:p="http://schemas.openxmlformats.org/presentationml/2006/main">
+  <p:cSld>
+    <p:spTree>
+      <p:nvGrpSpPr>
+        <p:cNvPr id="1" name=""/>
+        <p:cNvGrpSpPr/>
+        <p:nvPr/>
+      </p:nvGrpSpPr>
+      <p:grpSpPr>
+        <a:xfrm>
+          <a:off x="0" y="0"/>
+          <a:ext cx="0" cy="0"/>
+          <a:chOff x="0" y="0"/>
+          <a:chExt cx="0" cy="0"/>
+        </a:xfrm>
+      </p:grpSpPr>
+      <p:sp>
+        <p:nvSpPr>
           <p:cNvPr id="3" name="TextBox 2">
             <a:extLst>
               <a:ext uri="{FF2B5EF4-FFF2-40B4-BE49-F238E27FC236}">
@@ -13544,7 +12955,7 @@
 </p:sld>
 </file>
 
-<file path=ppt/slides/slide21.xml><?xml version="1.0" encoding="utf-8"?>
+<file path=ppt/slides/slide22.xml><?xml version="1.0" encoding="utf-8"?>
 <p:sld xmlns:a="http://schemas.openxmlformats.org/drawingml/2006/main" xmlns:r="http://schemas.openxmlformats.org/officeDocument/2006/relationships" xmlns:p="http://schemas.openxmlformats.org/presentationml/2006/main">
   <p:cSld>
     <p:spTree>
@@ -13628,8 +13039,8 @@
         </p:blipFill>
         <p:spPr>
           <a:xfrm>
-            <a:off x="1179226" y="1600200"/>
-            <a:ext cx="7772400" cy="1412313"/>
+            <a:off x="897838" y="2590800"/>
+            <a:ext cx="11322515" cy="2057400"/>
           </a:xfrm>
           <a:prstGeom prst="rect">
             <a:avLst/>
@@ -13649,7 +13060,397 @@
 </p:sld>
 </file>
 
-<file path=ppt/slides/slide22.xml><?xml version="1.0" encoding="utf-8"?>
+<file path=ppt/slides/slide23.xml><?xml version="1.0" encoding="utf-8"?>
+<p:sld xmlns:a="http://schemas.openxmlformats.org/drawingml/2006/main" xmlns:r="http://schemas.openxmlformats.org/officeDocument/2006/relationships" xmlns:p="http://schemas.openxmlformats.org/presentationml/2006/main">
+  <p:cSld>
+    <p:spTree>
+      <p:nvGrpSpPr>
+        <p:cNvPr id="1" name=""/>
+        <p:cNvGrpSpPr/>
+        <p:nvPr/>
+      </p:nvGrpSpPr>
+      <p:grpSpPr>
+        <a:xfrm>
+          <a:off x="0" y="0"/>
+          <a:ext cx="0" cy="0"/>
+          <a:chOff x="0" y="0"/>
+          <a:chExt cx="0" cy="0"/>
+        </a:xfrm>
+      </p:grpSpPr>
+      <p:sp>
+        <p:nvSpPr>
+          <p:cNvPr id="3" name="TextBox 2">
+            <a:extLst>
+              <a:ext uri="{FF2B5EF4-FFF2-40B4-BE49-F238E27FC236}">
+                <a16:creationId xmlns:a16="http://schemas.microsoft.com/office/drawing/2014/main" id="{7DF97375-F54C-B706-C7B4-E6213646EAFB}"/>
+              </a:ext>
+            </a:extLst>
+          </p:cNvPr>
+          <p:cNvSpPr txBox="1"/>
+          <p:nvPr/>
+        </p:nvSpPr>
+        <p:spPr>
+          <a:xfrm>
+            <a:off x="2514600" y="58846"/>
+            <a:ext cx="8686800" cy="7294305"/>
+          </a:xfrm>
+          <a:prstGeom prst="rect">
+            <a:avLst/>
+          </a:prstGeom>
+          <a:solidFill>
+            <a:schemeClr val="bg2"/>
+          </a:solidFill>
+        </p:spPr>
+        <p:txBody>
+          <a:bodyPr wrap="square">
+            <a:spAutoFit/>
+          </a:bodyPr>
+          <a:lstStyle/>
+          <a:p>
+            <a:r>
+              <a:rPr lang="en-GB" sz="1800" dirty="0"/>
+              <a:t>import </a:t>
+            </a:r>
+            <a:r>
+              <a:rPr lang="en-GB" sz="1800" dirty="0" err="1"/>
+              <a:t>java.util.Scanner</a:t>
+            </a:r>
+            <a:r>
+              <a:rPr lang="en-GB" sz="1800" dirty="0"/>
+              <a:t>;</a:t>
+            </a:r>
+          </a:p>
+          <a:p>
+            <a:endParaRPr lang="en-GB" sz="1800" dirty="0"/>
+          </a:p>
+          <a:p>
+            <a:r>
+              <a:rPr lang="en-GB" sz="1800" dirty="0"/>
+              <a:t>public class Sentinel {</a:t>
+            </a:r>
+          </a:p>
+          <a:p>
+            <a:endParaRPr lang="en-GB" sz="1800" dirty="0"/>
+          </a:p>
+          <a:p>
+            <a:r>
+              <a:rPr lang="en-GB" sz="1800" dirty="0"/>
+              <a:t>    public static void main(String[] </a:t>
+            </a:r>
+            <a:r>
+              <a:rPr lang="en-GB" sz="1800" dirty="0" err="1"/>
+              <a:t>args</a:t>
+            </a:r>
+            <a:r>
+              <a:rPr lang="en-GB" sz="1800" dirty="0"/>
+              <a:t>) {</a:t>
+            </a:r>
+          </a:p>
+          <a:p>
+            <a:endParaRPr lang="en-GB" sz="1800" dirty="0"/>
+          </a:p>
+          <a:p>
+            <a:r>
+              <a:rPr lang="en-GB" sz="1800" dirty="0"/>
+              <a:t>        Scanner </a:t>
+            </a:r>
+            <a:r>
+              <a:rPr lang="en-GB" sz="1800" dirty="0" err="1"/>
+              <a:t>indlæser</a:t>
+            </a:r>
+            <a:r>
+              <a:rPr lang="en-GB" sz="1800" dirty="0"/>
+              <a:t> = new Scanner(</a:t>
+            </a:r>
+            <a:r>
+              <a:rPr lang="en-GB" sz="1800" dirty="0" err="1"/>
+              <a:t>System.in</a:t>
+            </a:r>
+            <a:r>
+              <a:rPr lang="en-GB" sz="1800" dirty="0"/>
+              <a:t>);</a:t>
+            </a:r>
+          </a:p>
+          <a:p>
+            <a:endParaRPr lang="en-GB" sz="1800" dirty="0"/>
+          </a:p>
+          <a:p>
+            <a:r>
+              <a:rPr lang="en-GB" sz="1800" dirty="0"/>
+              <a:t>        int sum = 0;</a:t>
+            </a:r>
+          </a:p>
+          <a:p>
+            <a:r>
+              <a:rPr lang="en-GB" sz="1800" dirty="0"/>
+              <a:t>        int </a:t>
+            </a:r>
+            <a:r>
+              <a:rPr lang="en-GB" sz="1800" dirty="0" err="1"/>
+              <a:t>tal</a:t>
+            </a:r>
+            <a:r>
+              <a:rPr lang="en-GB" sz="1800" dirty="0"/>
+              <a:t>;</a:t>
+            </a:r>
+          </a:p>
+          <a:p>
+            <a:endParaRPr lang="en-GB" sz="1800" dirty="0"/>
+          </a:p>
+          <a:p>
+            <a:r>
+              <a:rPr lang="en-GB" sz="1800" dirty="0"/>
+              <a:t>        </a:t>
+            </a:r>
+            <a:r>
+              <a:rPr lang="en-GB" sz="1800" dirty="0" err="1"/>
+              <a:t>System.out.println</a:t>
+            </a:r>
+            <a:r>
+              <a:rPr lang="en-GB" sz="1800" dirty="0"/>
+              <a:t>("</a:t>
+            </a:r>
+            <a:r>
+              <a:rPr lang="en-GB" sz="1800" dirty="0" err="1"/>
+              <a:t>Indtast</a:t>
+            </a:r>
+            <a:r>
+              <a:rPr lang="en-GB" sz="1800" dirty="0"/>
+              <a:t> </a:t>
+            </a:r>
+            <a:r>
+              <a:rPr lang="en-GB" sz="1800" dirty="0" err="1"/>
+              <a:t>tal</a:t>
+            </a:r>
+            <a:r>
+              <a:rPr lang="en-GB" sz="1800" dirty="0"/>
+              <a:t>: ");</a:t>
+            </a:r>
+          </a:p>
+          <a:p>
+            <a:r>
+              <a:rPr lang="en-GB" sz="1800" dirty="0"/>
+              <a:t>        </a:t>
+            </a:r>
+            <a:r>
+              <a:rPr lang="en-GB" sz="1800" dirty="0" err="1"/>
+              <a:t>tal</a:t>
+            </a:r>
+            <a:r>
+              <a:rPr lang="en-GB" sz="1800" dirty="0"/>
+              <a:t> = </a:t>
+            </a:r>
+            <a:r>
+              <a:rPr lang="en-GB" sz="1800" dirty="0" err="1"/>
+              <a:t>indlæser.nextInt</a:t>
+            </a:r>
+            <a:r>
+              <a:rPr lang="en-GB" sz="1800" dirty="0"/>
+              <a:t>();</a:t>
+            </a:r>
+          </a:p>
+          <a:p>
+            <a:endParaRPr lang="en-GB" sz="1800" dirty="0"/>
+          </a:p>
+          <a:p>
+            <a:r>
+              <a:rPr lang="en-GB" sz="1800" dirty="0"/>
+              <a:t>        while (</a:t>
+            </a:r>
+            <a:r>
+              <a:rPr lang="en-GB" sz="1800" dirty="0" err="1"/>
+              <a:t>tal</a:t>
+            </a:r>
+            <a:r>
+              <a:rPr lang="en-GB" sz="1800" dirty="0"/>
+              <a:t> != 0) {</a:t>
+            </a:r>
+          </a:p>
+          <a:p>
+            <a:r>
+              <a:rPr lang="en-GB" sz="1800" dirty="0"/>
+              <a:t>            sum += </a:t>
+            </a:r>
+            <a:r>
+              <a:rPr lang="en-GB" sz="1800" dirty="0" err="1"/>
+              <a:t>tal</a:t>
+            </a:r>
+            <a:r>
+              <a:rPr lang="en-GB" sz="1800" dirty="0"/>
+              <a:t>;</a:t>
+            </a:r>
+          </a:p>
+          <a:p>
+            <a:endParaRPr lang="en-GB" sz="1800" dirty="0"/>
+          </a:p>
+          <a:p>
+            <a:r>
+              <a:rPr lang="en-GB" sz="1800" dirty="0"/>
+              <a:t>            </a:t>
+            </a:r>
+            <a:r>
+              <a:rPr lang="en-GB" sz="1800" dirty="0" err="1"/>
+              <a:t>System.out.println</a:t>
+            </a:r>
+            <a:r>
+              <a:rPr lang="en-GB" sz="1800" dirty="0"/>
+              <a:t>("</a:t>
+            </a:r>
+            <a:r>
+              <a:rPr lang="en-GB" sz="1800" dirty="0" err="1"/>
+              <a:t>Indtast</a:t>
+            </a:r>
+            <a:r>
+              <a:rPr lang="en-GB" sz="1800" dirty="0"/>
+              <a:t> </a:t>
+            </a:r>
+            <a:r>
+              <a:rPr lang="en-GB" sz="1800" dirty="0" err="1"/>
+              <a:t>tal</a:t>
+            </a:r>
+            <a:r>
+              <a:rPr lang="en-GB" sz="1800" dirty="0"/>
+              <a:t>: ");</a:t>
+            </a:r>
+          </a:p>
+          <a:p>
+            <a:r>
+              <a:rPr lang="en-GB" sz="1800" dirty="0"/>
+              <a:t>            </a:t>
+            </a:r>
+            <a:r>
+              <a:rPr lang="en-GB" sz="1800" dirty="0" err="1"/>
+              <a:t>tal</a:t>
+            </a:r>
+            <a:r>
+              <a:rPr lang="en-GB" sz="1800" dirty="0"/>
+              <a:t> = </a:t>
+            </a:r>
+            <a:r>
+              <a:rPr lang="en-GB" sz="1800" dirty="0" err="1"/>
+              <a:t>indlæser.nextInt</a:t>
+            </a:r>
+            <a:r>
+              <a:rPr lang="en-GB" sz="1800" dirty="0"/>
+              <a:t>();</a:t>
+            </a:r>
+          </a:p>
+          <a:p>
+            <a:r>
+              <a:rPr lang="en-GB" sz="1800" dirty="0"/>
+              <a:t>        }</a:t>
+            </a:r>
+          </a:p>
+          <a:p>
+            <a:endParaRPr lang="en-GB" sz="1800" dirty="0"/>
+          </a:p>
+          <a:p>
+            <a:r>
+              <a:rPr lang="en-GB" sz="1800" dirty="0"/>
+              <a:t>        </a:t>
+            </a:r>
+            <a:r>
+              <a:rPr lang="en-GB" sz="1800" dirty="0" err="1"/>
+              <a:t>System.out.println</a:t>
+            </a:r>
+            <a:r>
+              <a:rPr lang="en-GB" sz="1800" dirty="0"/>
+              <a:t>("</a:t>
+            </a:r>
+            <a:r>
+              <a:rPr lang="en-GB" sz="1800" dirty="0" err="1"/>
+              <a:t>Summen</a:t>
+            </a:r>
+            <a:r>
+              <a:rPr lang="en-GB" sz="1800" dirty="0"/>
+              <a:t> er " + sum);</a:t>
+            </a:r>
+          </a:p>
+          <a:p>
+            <a:endParaRPr lang="en-GB" sz="1800" dirty="0"/>
+          </a:p>
+          <a:p>
+            <a:r>
+              <a:rPr lang="en-GB" sz="1800" dirty="0"/>
+              <a:t>        </a:t>
+            </a:r>
+            <a:r>
+              <a:rPr lang="en-GB" sz="1800" dirty="0" err="1"/>
+              <a:t>indlæser.close</a:t>
+            </a:r>
+            <a:r>
+              <a:rPr lang="en-GB" sz="1800" dirty="0"/>
+              <a:t>();</a:t>
+            </a:r>
+          </a:p>
+          <a:p>
+            <a:r>
+              <a:rPr lang="en-GB" sz="1800" dirty="0"/>
+              <a:t>    }</a:t>
+            </a:r>
+          </a:p>
+          <a:p>
+            <a:r>
+              <a:rPr lang="en-GB" sz="1800" dirty="0"/>
+              <a:t>}</a:t>
+            </a:r>
+            <a:endParaRPr lang="en-DK" sz="1800" dirty="0"/>
+          </a:p>
+        </p:txBody>
+      </p:sp>
+      <p:sp>
+        <p:nvSpPr>
+          <p:cNvPr id="2" name="TextBox 1">
+            <a:extLst>
+              <a:ext uri="{FF2B5EF4-FFF2-40B4-BE49-F238E27FC236}">
+                <a16:creationId xmlns:a16="http://schemas.microsoft.com/office/drawing/2014/main" id="{AF8616AB-84FB-EA84-AD3A-F17DADFAEC93}"/>
+              </a:ext>
+            </a:extLst>
+          </p:cNvPr>
+          <p:cNvSpPr txBox="1"/>
+          <p:nvPr/>
+        </p:nvSpPr>
+        <p:spPr>
+          <a:xfrm>
+            <a:off x="0" y="6248400"/>
+            <a:ext cx="6100996" cy="369332"/>
+          </a:xfrm>
+          <a:prstGeom prst="rect">
+            <a:avLst/>
+          </a:prstGeom>
+          <a:noFill/>
+        </p:spPr>
+        <p:txBody>
+          <a:bodyPr wrap="square">
+            <a:spAutoFit/>
+          </a:bodyPr>
+          <a:lstStyle/>
+          <a:p>
+            <a:r>
+              <a:rPr lang="en-DK" b="1" dirty="0"/>
+              <a:t>sentinel- demo</a:t>
+            </a:r>
+            <a:r>
+              <a:rPr lang="en-DK" dirty="0"/>
+              <a:t> </a:t>
+            </a:r>
+          </a:p>
+        </p:txBody>
+      </p:sp>
+    </p:spTree>
+    <p:extLst>
+      <p:ext uri="{BB962C8B-B14F-4D97-AF65-F5344CB8AC3E}">
+        <p14:creationId xmlns:p14="http://schemas.microsoft.com/office/powerpoint/2010/main" val="520339528"/>
+      </p:ext>
+    </p:extLst>
+  </p:cSld>
+  <p:clrMapOvr>
+    <a:masterClrMapping/>
+  </p:clrMapOvr>
+</p:sld>
+</file>
+
+<file path=ppt/slides/slide24.xml><?xml version="1.0" encoding="utf-8"?>
 <p:sld xmlns:a="http://schemas.openxmlformats.org/drawingml/2006/main" xmlns:r="http://schemas.openxmlformats.org/officeDocument/2006/relationships" xmlns:p="http://schemas.openxmlformats.org/presentationml/2006/main">
   <p:cSld>
     <p:spTree>
@@ -14198,7 +13999,7 @@
 </p:sld>
 </file>
 
-<file path=ppt/slides/slide23.xml><?xml version="1.0" encoding="utf-8"?>
+<file path=ppt/slides/slide25.xml><?xml version="1.0" encoding="utf-8"?>
 <p:sld xmlns:a="http://schemas.openxmlformats.org/drawingml/2006/main" xmlns:r="http://schemas.openxmlformats.org/officeDocument/2006/relationships" xmlns:p="http://schemas.openxmlformats.org/presentationml/2006/main">
   <p:cSld>
     <p:spTree>
@@ -14588,7 +14389,7 @@
 </p:sld>
 </file>
 
-<file path=ppt/slides/slide24.xml><?xml version="1.0" encoding="utf-8"?>
+<file path=ppt/slides/slide26.xml><?xml version="1.0" encoding="utf-8"?>
 <p:sld xmlns:a="http://schemas.openxmlformats.org/drawingml/2006/main" xmlns:r="http://schemas.openxmlformats.org/officeDocument/2006/relationships" xmlns:p="http://schemas.openxmlformats.org/presentationml/2006/main">
   <p:cSld>
     <p:spTree>
@@ -14831,192 +14632,7 @@
 </p:sld>
 </file>
 
-<file path=ppt/slides/slide25.xml><?xml version="1.0" encoding="utf-8"?>
-<p:sld xmlns:a="http://schemas.openxmlformats.org/drawingml/2006/main" xmlns:r="http://schemas.openxmlformats.org/officeDocument/2006/relationships" xmlns:p="http://schemas.openxmlformats.org/presentationml/2006/main">
-  <p:cSld>
-    <p:spTree>
-      <p:nvGrpSpPr>
-        <p:cNvPr id="1" name=""/>
-        <p:cNvGrpSpPr/>
-        <p:nvPr/>
-      </p:nvGrpSpPr>
-      <p:grpSpPr>
-        <a:xfrm>
-          <a:off x="0" y="0"/>
-          <a:ext cx="0" cy="0"/>
-          <a:chOff x="0" y="0"/>
-          <a:chExt cx="0" cy="0"/>
-        </a:xfrm>
-      </p:grpSpPr>
-      <p:sp>
-        <p:nvSpPr>
-          <p:cNvPr id="3" name="TextBox 2">
-            <a:extLst>
-              <a:ext uri="{FF2B5EF4-FFF2-40B4-BE49-F238E27FC236}">
-                <a16:creationId xmlns:a16="http://schemas.microsoft.com/office/drawing/2014/main" id="{7DF97375-F54C-B706-C7B4-E6213646EAFB}"/>
-              </a:ext>
-            </a:extLst>
-          </p:cNvPr>
-          <p:cNvSpPr txBox="1"/>
-          <p:nvPr/>
-        </p:nvSpPr>
-        <p:spPr>
-          <a:xfrm>
-            <a:off x="2590800" y="228600"/>
-            <a:ext cx="8686800" cy="6740307"/>
-          </a:xfrm>
-          <a:prstGeom prst="rect">
-            <a:avLst/>
-          </a:prstGeom>
-          <a:solidFill>
-            <a:schemeClr val="bg2"/>
-          </a:solidFill>
-        </p:spPr>
-        <p:txBody>
-          <a:bodyPr wrap="square">
-            <a:spAutoFit/>
-          </a:bodyPr>
-          <a:lstStyle/>
-          <a:p>
-            <a:r>
-              <a:rPr lang="en-DK" dirty="0"/>
-              <a:t>import java.io.BufferedReader;</a:t>
-            </a:r>
-          </a:p>
-          <a:p>
-            <a:r>
-              <a:rPr lang="en-DK" dirty="0"/>
-              <a:t>import java.io.InputStreamReader;</a:t>
-            </a:r>
-          </a:p>
-          <a:p>
-            <a:endParaRPr lang="en-DK" dirty="0"/>
-          </a:p>
-          <a:p>
-            <a:r>
-              <a:rPr lang="en-DK" dirty="0"/>
-              <a:t>public class Sentinel {</a:t>
-            </a:r>
-          </a:p>
-          <a:p>
-            <a:endParaRPr lang="en-DK" dirty="0"/>
-          </a:p>
-          <a:p>
-            <a:r>
-              <a:rPr lang="en-DK" dirty="0"/>
-              <a:t>    public static void main(String[] args) throws Exception {</a:t>
-            </a:r>
-          </a:p>
-          <a:p>
-            <a:endParaRPr lang="en-DK" dirty="0"/>
-          </a:p>
-          <a:p>
-            <a:r>
-              <a:rPr lang="en-DK" dirty="0"/>
-              <a:t>        BufferedReader indlæser =</a:t>
-            </a:r>
-          </a:p>
-          <a:p>
-            <a:r>
-              <a:rPr lang="en-DK" dirty="0"/>
-              <a:t>                new BufferedReader(new InputStreamReader(System.in));</a:t>
-            </a:r>
-          </a:p>
-          <a:p>
-            <a:endParaRPr lang="en-DK" dirty="0"/>
-          </a:p>
-          <a:p>
-            <a:r>
-              <a:rPr lang="en-DK" dirty="0"/>
-              <a:t>        int sum = 0;</a:t>
-            </a:r>
-          </a:p>
-          <a:p>
-            <a:r>
-              <a:rPr lang="en-DK" dirty="0"/>
-              <a:t>        int tal;</a:t>
-            </a:r>
-          </a:p>
-          <a:p>
-            <a:endParaRPr lang="en-DK" dirty="0"/>
-          </a:p>
-          <a:p>
-            <a:r>
-              <a:rPr lang="en-DK" dirty="0"/>
-              <a:t>        do {</a:t>
-            </a:r>
-          </a:p>
-          <a:p>
-            <a:r>
-              <a:rPr lang="en-DK" dirty="0"/>
-              <a:t>            System.out.println("Indtast tal: ");</a:t>
-            </a:r>
-          </a:p>
-          <a:p>
-            <a:r>
-              <a:rPr lang="en-DK" dirty="0"/>
-              <a:t>            tal = Integer.parseInt(indlæser.readLine());</a:t>
-            </a:r>
-          </a:p>
-          <a:p>
-            <a:endParaRPr lang="en-DK" dirty="0"/>
-          </a:p>
-          <a:p>
-            <a:r>
-              <a:rPr lang="en-DK" dirty="0"/>
-              <a:t>            sum += tal;</a:t>
-            </a:r>
-          </a:p>
-          <a:p>
-            <a:endParaRPr lang="en-DK" dirty="0"/>
-          </a:p>
-          <a:p>
-            <a:r>
-              <a:rPr lang="en-DK" dirty="0"/>
-              <a:t>        } </a:t>
-            </a:r>
-            <a:r>
-              <a:rPr lang="en-DK" b="1" dirty="0"/>
-              <a:t>while (tal != 0);</a:t>
-            </a:r>
-          </a:p>
-          <a:p>
-            <a:endParaRPr lang="en-DK" dirty="0"/>
-          </a:p>
-          <a:p>
-            <a:r>
-              <a:rPr lang="en-DK" dirty="0"/>
-              <a:t>        System.out.println("Summen er " + sum);</a:t>
-            </a:r>
-          </a:p>
-          <a:p>
-            <a:r>
-              <a:rPr lang="en-DK" dirty="0"/>
-              <a:t>    }</a:t>
-            </a:r>
-          </a:p>
-          <a:p>
-            <a:r>
-              <a:rPr lang="en-DK" dirty="0"/>
-              <a:t>}</a:t>
-            </a:r>
-          </a:p>
-        </p:txBody>
-      </p:sp>
-    </p:spTree>
-    <p:extLst>
-      <p:ext uri="{BB962C8B-B14F-4D97-AF65-F5344CB8AC3E}">
-        <p14:creationId xmlns:p14="http://schemas.microsoft.com/office/powerpoint/2010/main" val="610902797"/>
-      </p:ext>
-    </p:extLst>
-  </p:cSld>
-  <p:clrMapOvr>
-    <a:masterClrMapping/>
-  </p:clrMapOvr>
-</p:sld>
-</file>
-
-<file path=ppt/slides/slide26.xml><?xml version="1.0" encoding="utf-8"?>
+<file path=ppt/slides/slide27.xml><?xml version="1.0" encoding="utf-8"?>
 <p:sld xmlns:a="http://schemas.openxmlformats.org/drawingml/2006/main" xmlns:r="http://schemas.openxmlformats.org/officeDocument/2006/relationships" xmlns:p="http://schemas.openxmlformats.org/presentationml/2006/main">
   <p:cSld>
     <p:bg>
@@ -15605,7 +15221,7 @@
           <p:nvPr>
             <p:extLst>
               <p:ext uri="{D42A27DB-BD31-4B8C-83A1-F6EECF244321}">
-                <p14:modId xmlns:p14="http://schemas.microsoft.com/office/powerpoint/2010/main" val="3723361712"/>
+                <p14:modId xmlns:p14="http://schemas.microsoft.com/office/powerpoint/2010/main" val="818782639"/>
               </p:ext>
             </p:extLst>
           </p:nvPr>
@@ -15773,7 +15389,7 @@
                             <a:schemeClr val="tx1"/>
                           </a:solidFill>
                         </a:rPr>
-                        <a:t>Arrays</a:t>
+                        <a:t>Array</a:t>
                       </a:r>
                     </a:p>
                   </a:txBody>
@@ -15934,12 +15550,12 @@
                         <a:buNone/>
                       </a:pPr>
                       <a:r>
-                        <a:rPr lang="en-DK" sz="3200" cap="none" spc="0">
+                        <a:rPr lang="en-DK" sz="3200" cap="none" spc="0" dirty="0">
                           <a:solidFill>
                             <a:schemeClr val="tx1"/>
                           </a:solidFill>
                         </a:rPr>
-                        <a:t>do-while</a:t>
+                        <a:t>For</a:t>
                       </a:r>
                     </a:p>
                   </a:txBody>
@@ -16016,22 +15632,6 @@
                       <a:pPr>
                         <a:buNone/>
                       </a:pPr>
-                      <a:r>
-                        <a:rPr lang="en-GB" sz="3200" cap="none" spc="0" dirty="0">
-                          <a:solidFill>
-                            <a:schemeClr val="tx1"/>
-                          </a:solidFill>
-                        </a:rPr>
-                        <a:t>F</a:t>
-                      </a:r>
-                      <a:r>
-                        <a:rPr lang="en-DK" sz="3200" cap="none" spc="0" dirty="0">
-                          <a:solidFill>
-                            <a:schemeClr val="tx1"/>
-                          </a:solidFill>
-                        </a:rPr>
-                        <a:t>or &amp; </a:t>
-                      </a:r>
                       <a:r>
                         <a:rPr lang="en-DK" sz="3200" dirty="0"/>
                         <a:t>Scope of counter variable</a:t>
@@ -21062,6 +20662,21 @@
 </file>
 
 <file path=customXml/item1.xml><?xml version="1.0" encoding="utf-8"?>
+<?mso-contentType ?>
+<FormTemplates xmlns="http://schemas.microsoft.com/sharepoint/v3/contenttype/forms">
+  <Display>DocumentLibraryForm</Display>
+  <Edit>DocumentLibraryForm</Edit>
+  <New>DocumentLibraryForm</New>
+</FormTemplates>
+</file>
+
+<file path=customXml/item2.xml><?xml version="1.0" encoding="utf-8"?>
+<p:properties xmlns:p="http://schemas.microsoft.com/office/2006/metadata/properties" xmlns:xsi="http://www.w3.org/2001/XMLSchema-instance" xmlns:pc="http://schemas.microsoft.com/office/infopath/2007/PartnerControls">
+  <documentManagement/>
+</p:properties>
+</file>
+
+<file path=customXml/item3.xml><?xml version="1.0" encoding="utf-8"?>
 <ct:contentTypeSchema xmlns:ct="http://schemas.microsoft.com/office/2006/metadata/contentType" xmlns:ma="http://schemas.microsoft.com/office/2006/metadata/properties/metaAttributes" ct:_="" ma:_="" ma:contentTypeName="Document" ma:contentTypeID="0x010100E57D341C545B0A44A26A103333756E90" ma:contentTypeVersion="3" ma:contentTypeDescription="Create a new document." ma:contentTypeScope="" ma:versionID="a6ec9fbdc07486795f51e30fe74f98ab">
   <xsd:schema xmlns:xsd="http://www.w3.org/2001/XMLSchema" xmlns:xs="http://www.w3.org/2001/XMLSchema" xmlns:p="http://schemas.microsoft.com/office/2006/metadata/properties" xmlns:ns2="324ab4a6-501d-4b19-a031-862034374e5f" targetNamespace="http://schemas.microsoft.com/office/2006/metadata/properties" ma:root="true" ma:fieldsID="af1894268a3b1d0258822da1f8692495" ns2:_="">
     <xsd:import namespace="324ab4a6-501d-4b19-a031-862034374e5f"/>
@@ -21199,22 +20814,24 @@
 </ct:contentTypeSchema>
 </file>
 
-<file path=customXml/item2.xml><?xml version="1.0" encoding="utf-8"?>
-<p:properties xmlns:p="http://schemas.microsoft.com/office/2006/metadata/properties" xmlns:xsi="http://www.w3.org/2001/XMLSchema-instance" xmlns:pc="http://schemas.microsoft.com/office/infopath/2007/PartnerControls">
-  <documentManagement/>
-</p:properties>
+<file path=customXml/itemProps1.xml><?xml version="1.0" encoding="utf-8"?>
+<ds:datastoreItem xmlns:ds="http://schemas.openxmlformats.org/officeDocument/2006/customXml" ds:itemID="{77646C84-701A-4061-B977-6AA8F23187E4}">
+  <ds:schemaRefs>
+    <ds:schemaRef ds:uri="http://schemas.microsoft.com/sharepoint/v3/contenttype/forms"/>
+  </ds:schemaRefs>
+</ds:datastoreItem>
 </file>
 
-<file path=customXml/item3.xml><?xml version="1.0" encoding="utf-8"?>
-<?mso-contentType ?>
-<FormTemplates xmlns="http://schemas.microsoft.com/sharepoint/v3/contenttype/forms">
-  <Display>DocumentLibraryForm</Display>
-  <Edit>DocumentLibraryForm</Edit>
-  <New>DocumentLibraryForm</New>
-</FormTemplates>
+<file path=customXml/itemProps2.xml><?xml version="1.0" encoding="utf-8"?>
+<ds:datastoreItem xmlns:ds="http://schemas.openxmlformats.org/officeDocument/2006/customXml" ds:itemID="{551C73E0-21DE-44C0-AC09-20B6FA27554C}">
+  <ds:schemaRefs>
+    <ds:schemaRef ds:uri="http://schemas.microsoft.com/office/2006/metadata/properties"/>
+    <ds:schemaRef ds:uri="http://schemas.microsoft.com/office/infopath/2007/PartnerControls"/>
+  </ds:schemaRefs>
+</ds:datastoreItem>
 </file>
 
-<file path=customXml/itemProps1.xml><?xml version="1.0" encoding="utf-8"?>
+<file path=customXml/itemProps3.xml><?xml version="1.0" encoding="utf-8"?>
 <ds:datastoreItem xmlns:ds="http://schemas.openxmlformats.org/officeDocument/2006/customXml" ds:itemID="{DDC95283-C95E-4740-9B60-A5D5E7C0A0D2}">
   <ds:schemaRefs>
     <ds:schemaRef ds:uri="http://schemas.microsoft.com/office/2006/metadata/contentType"/>
@@ -21230,21 +20847,4 @@
     <ds:schemaRef ds:uri="http://schemas.microsoft.com/internal/obd"/>
   </ds:schemaRefs>
 </ds:datastoreItem>
-</file>
-
-<file path=customXml/itemProps2.xml><?xml version="1.0" encoding="utf-8"?>
-<ds:datastoreItem xmlns:ds="http://schemas.openxmlformats.org/officeDocument/2006/customXml" ds:itemID="{551C73E0-21DE-44C0-AC09-20B6FA27554C}">
-  <ds:schemaRefs>
-    <ds:schemaRef ds:uri="http://schemas.microsoft.com/office/2006/metadata/properties"/>
-    <ds:schemaRef ds:uri="http://schemas.microsoft.com/office/infopath/2007/PartnerControls"/>
-  </ds:schemaRefs>
-</ds:datastoreItem>
-</file>
-
-<file path=customXml/itemProps3.xml><?xml version="1.0" encoding="utf-8"?>
-<ds:datastoreItem xmlns:ds="http://schemas.openxmlformats.org/officeDocument/2006/customXml" ds:itemID="{77646C84-701A-4061-B977-6AA8F23187E4}">
-  <ds:schemaRefs>
-    <ds:schemaRef ds:uri="http://schemas.microsoft.com/sharepoint/v3/contenttype/forms"/>
-  </ds:schemaRefs>
-</ds:datastoreItem>
 </file>